--- a/docs/approach.pptx
+++ b/docs/approach.pptx
@@ -2,20 +2,20 @@
 <file path=ppt/presentation.xml><?xml version="1.0" encoding="utf-8"?>
 <p:presentation xmlns:p="http://schemas.openxmlformats.org/presentationml/2006/main">
   <p:sldMasterIdLst>
-    <p:sldMasterId xmlns:r="http://schemas.openxmlformats.org/officeDocument/2006/relationships" id="2147483648" r:id="Rae5faa46389d41e9"/>
+    <p:sldMasterId xmlns:r="http://schemas.openxmlformats.org/officeDocument/2006/relationships" id="2147483648" r:id="R7aa61bc17f1d451d"/>
   </p:sldMasterIdLst>
   <p:notesMasterIdLst>
-    <p:notesMasterId xmlns:r="http://schemas.openxmlformats.org/officeDocument/2006/relationships" r:id="R25085b50b90845e7"/>
+    <p:notesMasterId xmlns:r="http://schemas.openxmlformats.org/officeDocument/2006/relationships" r:id="Rd93a95286bec4015"/>
   </p:notesMasterIdLst>
   <p:sldIdLst>
-    <p:sldId xmlns:r="http://schemas.openxmlformats.org/officeDocument/2006/relationships" id="256" r:id="R2547e74cfaa0488c"/>
-    <p:sldId xmlns:r="http://schemas.openxmlformats.org/officeDocument/2006/relationships" id="257" r:id="Rd9ca295ba172463a"/>
-    <p:sldId xmlns:r="http://schemas.openxmlformats.org/officeDocument/2006/relationships" id="258" r:id="R544e3cdaaebb4960"/>
-    <p:sldId xmlns:r="http://schemas.openxmlformats.org/officeDocument/2006/relationships" id="259" r:id="Reb88cbfc912444c1"/>
-    <p:sldId xmlns:r="http://schemas.openxmlformats.org/officeDocument/2006/relationships" id="260" r:id="R225b93ac2a814f11"/>
-    <p:sldId xmlns:r="http://schemas.openxmlformats.org/officeDocument/2006/relationships" id="261" r:id="Rb871da81ca4c466d"/>
-    <p:sldId xmlns:r="http://schemas.openxmlformats.org/officeDocument/2006/relationships" id="262" r:id="R71ac26f6ad4648da"/>
-    <p:sldId xmlns:r="http://schemas.openxmlformats.org/officeDocument/2006/relationships" id="263" r:id="R71828a13394d42bf"/>
+    <p:sldId xmlns:r="http://schemas.openxmlformats.org/officeDocument/2006/relationships" id="256" r:id="Rcf996789837b4e53"/>
+    <p:sldId xmlns:r="http://schemas.openxmlformats.org/officeDocument/2006/relationships" id="257" r:id="R65feeaea93bf4945"/>
+    <p:sldId xmlns:r="http://schemas.openxmlformats.org/officeDocument/2006/relationships" id="258" r:id="R8e93003e952843a3"/>
+    <p:sldId xmlns:r="http://schemas.openxmlformats.org/officeDocument/2006/relationships" id="259" r:id="R8bf4d26c50fe47c8"/>
+    <p:sldId xmlns:r="http://schemas.openxmlformats.org/officeDocument/2006/relationships" id="260" r:id="Rcd97c71cf1344f09"/>
+    <p:sldId xmlns:r="http://schemas.openxmlformats.org/officeDocument/2006/relationships" id="261" r:id="R91e0046ea9ff4fbf"/>
+    <p:sldId xmlns:r="http://schemas.openxmlformats.org/officeDocument/2006/relationships" id="262" r:id="R3693ff468cf44c89"/>
+    <p:sldId xmlns:r="http://schemas.openxmlformats.org/officeDocument/2006/relationships" id="263" r:id="Rbff4e154f26a4ff4"/>
   </p:sldIdLst>
   <p:sldSz cx="12192000" cy="6858000"/>
   <p:notesSz cx="6858000" cy="9144000"/>
@@ -3350,12 +3350,12 @@
   </p:cSld>
   <p:clrMap bg1="lt1" tx1="dk1" bg2="lt2" tx2="dk2" accent1="accent1" accent2="accent2" accent3="accent3" accent4="accent4" accent5="accent5" accent6="accent6" hlink="hlink" folHlink="folHlink"/>
   <p:sldLayoutIdLst>
-    <p:sldLayoutId xmlns:r="http://schemas.openxmlformats.org/officeDocument/2006/relationships" id="2147483649" r:id="R8d715403884442d1"/>
-    <p:sldLayoutId xmlns:r="http://schemas.openxmlformats.org/officeDocument/2006/relationships" id="2147483650" r:id="Rd4448fbbbb334d6c"/>
-    <p:sldLayoutId xmlns:r="http://schemas.openxmlformats.org/officeDocument/2006/relationships" id="2147483651" r:id="R678ae63ddbae4cf2"/>
-    <p:sldLayoutId xmlns:r="http://schemas.openxmlformats.org/officeDocument/2006/relationships" id="2147483652" r:id="R7535c1f6b1e74133"/>
-    <p:sldLayoutId xmlns:r="http://schemas.openxmlformats.org/officeDocument/2006/relationships" id="2147483653" r:id="R788aac412af84d7a"/>
-    <p:sldLayoutId xmlns:r="http://schemas.openxmlformats.org/officeDocument/2006/relationships" id="2147483654" r:id="R5c2016e5c6614737"/>
+    <p:sldLayoutId xmlns:r="http://schemas.openxmlformats.org/officeDocument/2006/relationships" id="2147483649" r:id="Rc461f90282774436"/>
+    <p:sldLayoutId xmlns:r="http://schemas.openxmlformats.org/officeDocument/2006/relationships" id="2147483650" r:id="Rf29cf1dd39a347a0"/>
+    <p:sldLayoutId xmlns:r="http://schemas.openxmlformats.org/officeDocument/2006/relationships" id="2147483651" r:id="R8c5addda60284fc6"/>
+    <p:sldLayoutId xmlns:r="http://schemas.openxmlformats.org/officeDocument/2006/relationships" id="2147483652" r:id="R568ecb63c6714045"/>
+    <p:sldLayoutId xmlns:r="http://schemas.openxmlformats.org/officeDocument/2006/relationships" id="2147483653" r:id="R7efe2385d9724b1a"/>
+    <p:sldLayoutId xmlns:r="http://schemas.openxmlformats.org/officeDocument/2006/relationships" id="2147483654" r:id="Rf1af53d0ff5e4736"/>
   </p:sldLayoutIdLst>
   <p:txStyles>
     <p:titleStyle>
@@ -3939,6 +3939,7 @@
               </a:defRPr>
             </a:defPPr>
             <a:lvl1pPr>
+              <a:buNone/>
               <a:defRPr sz="3300">
                 <a:solidFill>
                   <a:srgbClr val="FFFFFF"/>
@@ -3946,6 +3947,7 @@
               </a:defRPr>
             </a:lvl1pPr>
             <a:lvl2pPr>
+              <a:buNone/>
               <a:defRPr sz="3300">
                 <a:solidFill>
                   <a:srgbClr val="FFFFFF"/>
@@ -3953,6 +3955,7 @@
               </a:defRPr>
             </a:lvl2pPr>
             <a:lvl3pPr>
+              <a:buNone/>
               <a:defRPr sz="3300">
                 <a:solidFill>
                   <a:srgbClr val="FFFFFF"/>
@@ -3960,6 +3963,7 @@
               </a:defRPr>
             </a:lvl3pPr>
             <a:lvl4pPr>
+              <a:buNone/>
               <a:defRPr sz="3300">
                 <a:solidFill>
                   <a:srgbClr val="FFFFFF"/>
@@ -3967,6 +3971,7 @@
               </a:defRPr>
             </a:lvl4pPr>
             <a:lvl5pPr>
+              <a:buNone/>
               <a:defRPr sz="3300">
                 <a:solidFill>
                   <a:srgbClr val="FFFFFF"/>
@@ -3974,6 +3979,7 @@
               </a:defRPr>
             </a:lvl5pPr>
             <a:lvl6pPr>
+              <a:buNone/>
               <a:defRPr sz="3300">
                 <a:solidFill>
                   <a:srgbClr val="FFFFFF"/>
@@ -3981,6 +3987,7 @@
               </a:defRPr>
             </a:lvl6pPr>
             <a:lvl7pPr>
+              <a:buNone/>
               <a:defRPr sz="3300">
                 <a:solidFill>
                   <a:srgbClr val="FFFFFF"/>
@@ -3988,6 +3995,7 @@
               </a:defRPr>
             </a:lvl7pPr>
             <a:lvl8pPr>
+              <a:buNone/>
               <a:defRPr sz="3300">
                 <a:solidFill>
                   <a:srgbClr val="FFFFFF"/>
@@ -3995,6 +4003,7 @@
               </a:defRPr>
             </a:lvl8pPr>
             <a:lvl9pPr>
+              <a:buNone/>
               <a:defRPr sz="3300">
                 <a:solidFill>
                   <a:srgbClr val="FFFFFF"/>
@@ -4004,6 +4013,7 @@
           </a:lstStyle>
           <a:p xmlns:a="http://schemas.openxmlformats.org/drawingml/2006/main">
             <a:pPr>
+              <a:buNone/>
               <a:defRPr sz="3300">
                 <a:solidFill>
                   <a:srgbClr val="FFFFFF"/>
@@ -4059,6 +4069,7 @@
               </a:defRPr>
             </a:defPPr>
             <a:lvl1pPr>
+              <a:buNone/>
               <a:defRPr sz="1725">
                 <a:solidFill>
                   <a:srgbClr val="75E2CE"/>
@@ -4066,6 +4077,7 @@
               </a:defRPr>
             </a:lvl1pPr>
             <a:lvl2pPr>
+              <a:buNone/>
               <a:defRPr sz="1725">
                 <a:solidFill>
                   <a:srgbClr val="75E2CE"/>
@@ -4073,6 +4085,7 @@
               </a:defRPr>
             </a:lvl2pPr>
             <a:lvl3pPr>
+              <a:buNone/>
               <a:defRPr sz="1725">
                 <a:solidFill>
                   <a:srgbClr val="75E2CE"/>
@@ -4080,6 +4093,7 @@
               </a:defRPr>
             </a:lvl3pPr>
             <a:lvl4pPr>
+              <a:buNone/>
               <a:defRPr sz="1725">
                 <a:solidFill>
                   <a:srgbClr val="75E2CE"/>
@@ -4087,6 +4101,7 @@
               </a:defRPr>
             </a:lvl4pPr>
             <a:lvl5pPr>
+              <a:buNone/>
               <a:defRPr sz="1725">
                 <a:solidFill>
                   <a:srgbClr val="75E2CE"/>
@@ -4094,6 +4109,7 @@
               </a:defRPr>
             </a:lvl5pPr>
             <a:lvl6pPr>
+              <a:buNone/>
               <a:defRPr sz="1725">
                 <a:solidFill>
                   <a:srgbClr val="75E2CE"/>
@@ -4101,6 +4117,7 @@
               </a:defRPr>
             </a:lvl6pPr>
             <a:lvl7pPr>
+              <a:buNone/>
               <a:defRPr sz="1725">
                 <a:solidFill>
                   <a:srgbClr val="75E2CE"/>
@@ -4108,6 +4125,7 @@
               </a:defRPr>
             </a:lvl7pPr>
             <a:lvl8pPr>
+              <a:buNone/>
               <a:defRPr sz="1725">
                 <a:solidFill>
                   <a:srgbClr val="75E2CE"/>
@@ -4115,6 +4133,7 @@
               </a:defRPr>
             </a:lvl8pPr>
             <a:lvl9pPr>
+              <a:buNone/>
               <a:defRPr sz="1725">
                 <a:solidFill>
                   <a:srgbClr val="75E2CE"/>
@@ -4124,6 +4143,7 @@
           </a:lstStyle>
           <a:p xmlns:a="http://schemas.openxmlformats.org/drawingml/2006/main">
             <a:pPr>
+              <a:buNone/>
               <a:defRPr sz="1725">
                 <a:solidFill>
                   <a:srgbClr val="75E2CE"/>
@@ -4136,7 +4156,7 @@
                   <a:srgbClr val="75E2CE"/>
                 </a:solidFill>
               </a:rPr>
-              <a:t>Challenge 4 | LangGraph + A2A + OAuth</a:t>
+              <a:t>Challenge 4 | Official A2A SDK + LangGraph + OAuth</a:t>
             </a:r>
           </a:p>
         </p:txBody>
@@ -4179,6 +4199,7 @@
               </a:defRPr>
             </a:defPPr>
             <a:lvl1pPr>
+              <a:buNone/>
               <a:defRPr sz="2025">
                 <a:solidFill>
                   <a:srgbClr val="D3E0F0"/>
@@ -4186,6 +4207,7 @@
               </a:defRPr>
             </a:lvl1pPr>
             <a:lvl2pPr>
+              <a:buNone/>
               <a:defRPr sz="2025">
                 <a:solidFill>
                   <a:srgbClr val="D3E0F0"/>
@@ -4193,6 +4215,7 @@
               </a:defRPr>
             </a:lvl2pPr>
             <a:lvl3pPr>
+              <a:buNone/>
               <a:defRPr sz="2025">
                 <a:solidFill>
                   <a:srgbClr val="D3E0F0"/>
@@ -4200,6 +4223,7 @@
               </a:defRPr>
             </a:lvl3pPr>
             <a:lvl4pPr>
+              <a:buNone/>
               <a:defRPr sz="2025">
                 <a:solidFill>
                   <a:srgbClr val="D3E0F0"/>
@@ -4207,6 +4231,7 @@
               </a:defRPr>
             </a:lvl4pPr>
             <a:lvl5pPr>
+              <a:buNone/>
               <a:defRPr sz="2025">
                 <a:solidFill>
                   <a:srgbClr val="D3E0F0"/>
@@ -4214,6 +4239,7 @@
               </a:defRPr>
             </a:lvl5pPr>
             <a:lvl6pPr>
+              <a:buNone/>
               <a:defRPr sz="2025">
                 <a:solidFill>
                   <a:srgbClr val="D3E0F0"/>
@@ -4221,6 +4247,7 @@
               </a:defRPr>
             </a:lvl6pPr>
             <a:lvl7pPr>
+              <a:buNone/>
               <a:defRPr sz="2025">
                 <a:solidFill>
                   <a:srgbClr val="D3E0F0"/>
@@ -4228,6 +4255,7 @@
               </a:defRPr>
             </a:lvl7pPr>
             <a:lvl8pPr>
+              <a:buNone/>
               <a:defRPr sz="2025">
                 <a:solidFill>
                   <a:srgbClr val="D3E0F0"/>
@@ -4235,6 +4263,7 @@
               </a:defRPr>
             </a:lvl8pPr>
             <a:lvl9pPr>
+              <a:buNone/>
               <a:defRPr sz="2025">
                 <a:solidFill>
                   <a:srgbClr val="D3E0F0"/>
@@ -4244,6 +4273,7 @@
           </a:lstStyle>
           <a:p xmlns:a="http://schemas.openxmlformats.org/drawingml/2006/main">
             <a:pPr>
+              <a:buNone/>
               <a:defRPr sz="2025">
                 <a:solidFill>
                   <a:srgbClr val="D3E0F0"/>
@@ -4256,11 +4286,12 @@
                   <a:srgbClr val="D3E0F0"/>
                 </a:solidFill>
               </a:rPr>
-              <a:t>A travel assistant delegates to an airline.</a:t>
+              <a:t>Two independent processes delegate over HTTP.</a:t>
             </a:r>
           </a:p>
           <a:p xmlns:a="http://schemas.openxmlformats.org/drawingml/2006/main">
             <a:pPr>
+              <a:buNone/>
               <a:defRPr sz="2025">
                 <a:solidFill>
                   <a:srgbClr val="D3E0F0"/>
@@ -4273,7 +4304,145 @@
                   <a:srgbClr val="D3E0F0"/>
                 </a:solidFill>
               </a:rPr>
-              <a:t>The airline independently verifies who authorized each action.</a:t>
+              <a:t>The airline verifies who approved each operation.</a:t>
+            </a:r>
+          </a:p>
+          <a:p xmlns:a="http://schemas.openxmlformats.org/drawingml/2006/main">
+            <a:pPr>
+              <a:buNone/>
+              <a:defRPr sz="2025">
+                <a:solidFill>
+                  <a:srgbClr val="D3E0F0"/>
+                </a:solidFill>
+              </a:defRPr>
+            </a:pPr>
+            <a:r>
+              <a:rPr sz="2025">
+                <a:solidFill>
+                  <a:srgbClr val="D3E0F0"/>
+                </a:solidFill>
+              </a:rPr>
+              <a:t>Working booking, cancellation and operator dashboards.</a:t>
+            </a:r>
+          </a:p>
+        </p:txBody>
+      </p:sp>
+      <p:sp>
+        <p:nvSpPr>
+          <p:cNvPr id="5" name="">
+            <a:extLst xmlns:a="http://schemas.openxmlformats.org/drawingml/2006/main">
+              <a:ext uri="{FF2B5EF4-FFF2-40B4-BE49-F238E27FC236}">
+                <a16:creationId xmlns:a16="http://schemas.microsoft.com/office/drawing/2014/main" id="{D38D52D6-8B3F-4E2C-898C-ECD9B2AEC29C}"/>
+              </a:ext>
+            </a:extLst>
+          </p:cNvPr>
+          <p:cNvSpPr>
+            <a:spLocks xmlns:a="http://schemas.openxmlformats.org/drawingml/2006/main" noGrp="1"/>
+          </p:cNvSpPr>
+          <p:nvPr/>
+        </p:nvSpPr>
+        <p:spPr>
+          <a:xfrm xmlns:a="http://schemas.openxmlformats.org/drawingml/2006/main">
+            <a:off x="762000" y="6362700"/>
+            <a:ext cx="10668000" cy="285750"/>
+          </a:xfrm>
+          <a:prstGeom xmlns:a="http://schemas.openxmlformats.org/drawingml/2006/main" prst="rect">
+            <a:avLst/>
+          </a:prstGeom>
+          <a:noFill xmlns:a="http://schemas.openxmlformats.org/drawingml/2006/main"/>
+          <a:ln xmlns:a="http://schemas.openxmlformats.org/drawingml/2006/main" w="0">
+            <a:noFill/>
+          </a:ln>
+        </p:spPr>
+        <p:txBody>
+          <a:bodyPr xmlns:a="http://schemas.openxmlformats.org/drawingml/2006/main"/>
+          <a:lstStyle xmlns:a="http://schemas.openxmlformats.org/drawingml/2006/main">
+            <a:defPPr>
+              <a:defRPr sz="975">
+                <a:solidFill>
+                  <a:srgbClr val="8DA3C0"/>
+                </a:solidFill>
+              </a:defRPr>
+            </a:defPPr>
+            <a:lvl1pPr>
+              <a:defRPr sz="975">
+                <a:solidFill>
+                  <a:srgbClr val="8DA3C0"/>
+                </a:solidFill>
+              </a:defRPr>
+            </a:lvl1pPr>
+            <a:lvl2pPr>
+              <a:defRPr sz="975">
+                <a:solidFill>
+                  <a:srgbClr val="8DA3C0"/>
+                </a:solidFill>
+              </a:defRPr>
+            </a:lvl2pPr>
+            <a:lvl3pPr>
+              <a:defRPr sz="975">
+                <a:solidFill>
+                  <a:srgbClr val="8DA3C0"/>
+                </a:solidFill>
+              </a:defRPr>
+            </a:lvl3pPr>
+            <a:lvl4pPr>
+              <a:defRPr sz="975">
+                <a:solidFill>
+                  <a:srgbClr val="8DA3C0"/>
+                </a:solidFill>
+              </a:defRPr>
+            </a:lvl4pPr>
+            <a:lvl5pPr>
+              <a:defRPr sz="975">
+                <a:solidFill>
+                  <a:srgbClr val="8DA3C0"/>
+                </a:solidFill>
+              </a:defRPr>
+            </a:lvl5pPr>
+            <a:lvl6pPr>
+              <a:defRPr sz="975">
+                <a:solidFill>
+                  <a:srgbClr val="8DA3C0"/>
+                </a:solidFill>
+              </a:defRPr>
+            </a:lvl6pPr>
+            <a:lvl7pPr>
+              <a:defRPr sz="975">
+                <a:solidFill>
+                  <a:srgbClr val="8DA3C0"/>
+                </a:solidFill>
+              </a:defRPr>
+            </a:lvl7pPr>
+            <a:lvl8pPr>
+              <a:defRPr sz="975">
+                <a:solidFill>
+                  <a:srgbClr val="8DA3C0"/>
+                </a:solidFill>
+              </a:defRPr>
+            </a:lvl8pPr>
+            <a:lvl9pPr>
+              <a:defRPr sz="975">
+                <a:solidFill>
+                  <a:srgbClr val="8DA3C0"/>
+                </a:solidFill>
+              </a:defRPr>
+            </a:lvl9pPr>
+          </a:lstStyle>
+          <a:p xmlns:a="http://schemas.openxmlformats.org/drawingml/2006/main">
+            <a:pPr>
+              <a:defRPr sz="975">
+                <a:solidFill>
+                  <a:srgbClr val="8DA3C0"/>
+                </a:solidFill>
+              </a:defRPr>
+            </a:pPr>
+            <a:r>
+              <a:rPr sz="975">
+                <a:solidFill>
+                  <a:srgbClr val="8DA3C0"/>
+                </a:solidFill>
+              </a:rPr>
+              <a:t>Implementation and verification: README.md | docs/architecture.md</a:t>
             </a:r>
           </a:p>
         </p:txBody>
@@ -4345,6 +4514,7 @@
               </a:defRPr>
             </a:defPPr>
             <a:lvl1pPr>
+              <a:buNone/>
               <a:defRPr sz="3300">
                 <a:solidFill>
                   <a:srgbClr val="FFFFFF"/>
@@ -4352,6 +4522,7 @@
               </a:defRPr>
             </a:lvl1pPr>
             <a:lvl2pPr>
+              <a:buNone/>
               <a:defRPr sz="3300">
                 <a:solidFill>
                   <a:srgbClr val="FFFFFF"/>
@@ -4359,6 +4530,7 @@
               </a:defRPr>
             </a:lvl2pPr>
             <a:lvl3pPr>
+              <a:buNone/>
               <a:defRPr sz="3300">
                 <a:solidFill>
                   <a:srgbClr val="FFFFFF"/>
@@ -4366,6 +4538,7 @@
               </a:defRPr>
             </a:lvl3pPr>
             <a:lvl4pPr>
+              <a:buNone/>
               <a:defRPr sz="3300">
                 <a:solidFill>
                   <a:srgbClr val="FFFFFF"/>
@@ -4373,6 +4546,7 @@
               </a:defRPr>
             </a:lvl4pPr>
             <a:lvl5pPr>
+              <a:buNone/>
               <a:defRPr sz="3300">
                 <a:solidFill>
                   <a:srgbClr val="FFFFFF"/>
@@ -4380,6 +4554,7 @@
               </a:defRPr>
             </a:lvl5pPr>
             <a:lvl6pPr>
+              <a:buNone/>
               <a:defRPr sz="3300">
                 <a:solidFill>
                   <a:srgbClr val="FFFFFF"/>
@@ -4387,6 +4562,7 @@
               </a:defRPr>
             </a:lvl6pPr>
             <a:lvl7pPr>
+              <a:buNone/>
               <a:defRPr sz="3300">
                 <a:solidFill>
                   <a:srgbClr val="FFFFFF"/>
@@ -4394,6 +4570,7 @@
               </a:defRPr>
             </a:lvl7pPr>
             <a:lvl8pPr>
+              <a:buNone/>
               <a:defRPr sz="3300">
                 <a:solidFill>
                   <a:srgbClr val="FFFFFF"/>
@@ -4401,6 +4578,7 @@
               </a:defRPr>
             </a:lvl8pPr>
             <a:lvl9pPr>
+              <a:buNone/>
               <a:defRPr sz="3300">
                 <a:solidFill>
                   <a:srgbClr val="FFFFFF"/>
@@ -4410,6 +4588,7 @@
           </a:lstStyle>
           <a:p xmlns:a="http://schemas.openxmlformats.org/drawingml/2006/main">
             <a:pPr>
+              <a:buNone/>
               <a:defRPr sz="3300">
                 <a:solidFill>
                   <a:srgbClr val="FFFFFF"/>
@@ -4465,6 +4644,7 @@
               </a:defRPr>
             </a:defPPr>
             <a:lvl1pPr>
+              <a:buNone/>
               <a:defRPr sz="1725">
                 <a:solidFill>
                   <a:srgbClr val="75E2CE"/>
@@ -4472,6 +4652,7 @@
               </a:defRPr>
             </a:lvl1pPr>
             <a:lvl2pPr>
+              <a:buNone/>
               <a:defRPr sz="1725">
                 <a:solidFill>
                   <a:srgbClr val="75E2CE"/>
@@ -4479,6 +4660,7 @@
               </a:defRPr>
             </a:lvl2pPr>
             <a:lvl3pPr>
+              <a:buNone/>
               <a:defRPr sz="1725">
                 <a:solidFill>
                   <a:srgbClr val="75E2CE"/>
@@ -4486,6 +4668,7 @@
               </a:defRPr>
             </a:lvl3pPr>
             <a:lvl4pPr>
+              <a:buNone/>
               <a:defRPr sz="1725">
                 <a:solidFill>
                   <a:srgbClr val="75E2CE"/>
@@ -4493,6 +4676,7 @@
               </a:defRPr>
             </a:lvl4pPr>
             <a:lvl5pPr>
+              <a:buNone/>
               <a:defRPr sz="1725">
                 <a:solidFill>
                   <a:srgbClr val="75E2CE"/>
@@ -4500,6 +4684,7 @@
               </a:defRPr>
             </a:lvl5pPr>
             <a:lvl6pPr>
+              <a:buNone/>
               <a:defRPr sz="1725">
                 <a:solidFill>
                   <a:srgbClr val="75E2CE"/>
@@ -4507,6 +4692,7 @@
               </a:defRPr>
             </a:lvl6pPr>
             <a:lvl7pPr>
+              <a:buNone/>
               <a:defRPr sz="1725">
                 <a:solidFill>
                   <a:srgbClr val="75E2CE"/>
@@ -4514,6 +4700,7 @@
               </a:defRPr>
             </a:lvl7pPr>
             <a:lvl8pPr>
+              <a:buNone/>
               <a:defRPr sz="1725">
                 <a:solidFill>
                   <a:srgbClr val="75E2CE"/>
@@ -4521,6 +4708,7 @@
               </a:defRPr>
             </a:lvl8pPr>
             <a:lvl9pPr>
+              <a:buNone/>
               <a:defRPr sz="1725">
                 <a:solidFill>
                   <a:srgbClr val="75E2CE"/>
@@ -4530,6 +4718,7 @@
           </a:lstStyle>
           <a:p xmlns:a="http://schemas.openxmlformats.org/drawingml/2006/main">
             <a:pPr>
+              <a:buNone/>
               <a:defRPr sz="1725">
                 <a:solidFill>
                   <a:srgbClr val="75E2CE"/>
@@ -4542,7 +4731,7 @@
                   <a:srgbClr val="75E2CE"/>
                 </a:solidFill>
               </a:rPr>
-              <a:t>A → B over HTTP; no shared database</a:t>
+              <a:t>A proposes. The user approves. B confirms.</a:t>
             </a:r>
           </a:p>
         </p:txBody>
@@ -4585,6 +4774,7 @@
               </a:defRPr>
             </a:defPPr>
             <a:lvl1pPr>
+              <a:buNone/>
               <a:defRPr sz="2025">
                 <a:solidFill>
                   <a:srgbClr val="D3E0F0"/>
@@ -4592,6 +4782,7 @@
               </a:defRPr>
             </a:lvl1pPr>
             <a:lvl2pPr>
+              <a:buNone/>
               <a:defRPr sz="2025">
                 <a:solidFill>
                   <a:srgbClr val="D3E0F0"/>
@@ -4599,6 +4790,7 @@
               </a:defRPr>
             </a:lvl2pPr>
             <a:lvl3pPr>
+              <a:buNone/>
               <a:defRPr sz="2025">
                 <a:solidFill>
                   <a:srgbClr val="D3E0F0"/>
@@ -4606,6 +4798,7 @@
               </a:defRPr>
             </a:lvl3pPr>
             <a:lvl4pPr>
+              <a:buNone/>
               <a:defRPr sz="2025">
                 <a:solidFill>
                   <a:srgbClr val="D3E0F0"/>
@@ -4613,6 +4806,7 @@
               </a:defRPr>
             </a:lvl4pPr>
             <a:lvl5pPr>
+              <a:buNone/>
               <a:defRPr sz="2025">
                 <a:solidFill>
                   <a:srgbClr val="D3E0F0"/>
@@ -4620,6 +4814,7 @@
               </a:defRPr>
             </a:lvl5pPr>
             <a:lvl6pPr>
+              <a:buNone/>
               <a:defRPr sz="2025">
                 <a:solidFill>
                   <a:srgbClr val="D3E0F0"/>
@@ -4627,6 +4822,7 @@
               </a:defRPr>
             </a:lvl6pPr>
             <a:lvl7pPr>
+              <a:buNone/>
               <a:defRPr sz="2025">
                 <a:solidFill>
                   <a:srgbClr val="D3E0F0"/>
@@ -4634,6 +4830,7 @@
               </a:defRPr>
             </a:lvl7pPr>
             <a:lvl8pPr>
+              <a:buNone/>
               <a:defRPr sz="2025">
                 <a:solidFill>
                   <a:srgbClr val="D3E0F0"/>
@@ -4641,6 +4838,7 @@
               </a:defRPr>
             </a:lvl8pPr>
             <a:lvl9pPr>
+              <a:buNone/>
               <a:defRPr sz="2025">
                 <a:solidFill>
                   <a:srgbClr val="D3E0F0"/>
@@ -4650,6 +4848,7 @@
           </a:lstStyle>
           <a:p xmlns:a="http://schemas.openxmlformats.org/drawingml/2006/main">
             <a:pPr>
+              <a:buNone/>
               <a:defRPr sz="2025">
                 <a:solidFill>
                   <a:srgbClr val="D3E0F0"/>
@@ -4662,11 +4861,12 @@
                   <a:srgbClr val="D3E0F0"/>
                 </a:solidFill>
               </a:rPr>
-              <a:t>Agent A: conversation, discovery, consent initiation</a:t>
+              <a:t>Agent A: conversation, discovery and delegation</a:t>
             </a:r>
           </a:p>
           <a:p xmlns:a="http://schemas.openxmlformats.org/drawingml/2006/main">
             <a:pPr>
+              <a:buNone/>
               <a:defRPr sz="2025">
                 <a:solidFill>
                   <a:srgbClr val="D3E0F0"/>
@@ -4679,11 +4879,12 @@
                   <a:srgbClr val="D3E0F0"/>
                 </a:solidFill>
               </a:rPr>
-              <a:t>Keycloak: login, consent and signed token issuance</a:t>
+              <a:t>Keycloak: user authentication, consent and token issuance</a:t>
             </a:r>
           </a:p>
           <a:p xmlns:a="http://schemas.openxmlformats.org/drawingml/2006/main">
             <a:pPr>
+              <a:buNone/>
               <a:defRPr sz="2025">
                 <a:solidFill>
                   <a:srgbClr val="D3E0F0"/>
@@ -4696,7 +4897,145 @@
                   <a:srgbClr val="D3E0F0"/>
                 </a:solidFill>
               </a:rPr>
-              <a:t>Agent B: authorization, flight inventory and bookings</a:t>
+              <a:t>Agent B: permissions, inventory and booking transactions</a:t>
+            </a:r>
+          </a:p>
+          <a:p xmlns:a="http://schemas.openxmlformats.org/drawingml/2006/main">
+            <a:pPr>
+              <a:buNone/>
+              <a:defRPr sz="2025">
+                <a:solidFill>
+                  <a:srgbClr val="D3E0F0"/>
+                </a:solidFill>
+              </a:defRPr>
+            </a:pPr>
+            <a:r>
+              <a:rPr sz="2025">
+                <a:solidFill>
+                  <a:srgbClr val="D3E0F0"/>
+                </a:solidFill>
+              </a:rPr>
+              <a:t>Models propose tools; code enforces authorization.</a:t>
+            </a:r>
+          </a:p>
+        </p:txBody>
+      </p:sp>
+      <p:sp>
+        <p:nvSpPr>
+          <p:cNvPr id="5" name="">
+            <a:extLst xmlns:a="http://schemas.openxmlformats.org/drawingml/2006/main">
+              <a:ext uri="{FF2B5EF4-FFF2-40B4-BE49-F238E27FC236}">
+                <a16:creationId xmlns:a16="http://schemas.microsoft.com/office/drawing/2014/main" id="{B4E45A02-A78C-49AD-B72B-883172A204B4}"/>
+              </a:ext>
+            </a:extLst>
+          </p:cNvPr>
+          <p:cNvSpPr>
+            <a:spLocks xmlns:a="http://schemas.openxmlformats.org/drawingml/2006/main" noGrp="1"/>
+          </p:cNvSpPr>
+          <p:nvPr/>
+        </p:nvSpPr>
+        <p:spPr>
+          <a:xfrm xmlns:a="http://schemas.openxmlformats.org/drawingml/2006/main">
+            <a:off x="762000" y="6362700"/>
+            <a:ext cx="10668000" cy="285750"/>
+          </a:xfrm>
+          <a:prstGeom xmlns:a="http://schemas.openxmlformats.org/drawingml/2006/main" prst="rect">
+            <a:avLst/>
+          </a:prstGeom>
+          <a:noFill xmlns:a="http://schemas.openxmlformats.org/drawingml/2006/main"/>
+          <a:ln xmlns:a="http://schemas.openxmlformats.org/drawingml/2006/main" w="0">
+            <a:noFill/>
+          </a:ln>
+        </p:spPr>
+        <p:txBody>
+          <a:bodyPr xmlns:a="http://schemas.openxmlformats.org/drawingml/2006/main"/>
+          <a:lstStyle xmlns:a="http://schemas.openxmlformats.org/drawingml/2006/main">
+            <a:defPPr>
+              <a:defRPr sz="975">
+                <a:solidFill>
+                  <a:srgbClr val="8DA3C0"/>
+                </a:solidFill>
+              </a:defRPr>
+            </a:defPPr>
+            <a:lvl1pPr>
+              <a:defRPr sz="975">
+                <a:solidFill>
+                  <a:srgbClr val="8DA3C0"/>
+                </a:solidFill>
+              </a:defRPr>
+            </a:lvl1pPr>
+            <a:lvl2pPr>
+              <a:defRPr sz="975">
+                <a:solidFill>
+                  <a:srgbClr val="8DA3C0"/>
+                </a:solidFill>
+              </a:defRPr>
+            </a:lvl2pPr>
+            <a:lvl3pPr>
+              <a:defRPr sz="975">
+                <a:solidFill>
+                  <a:srgbClr val="8DA3C0"/>
+                </a:solidFill>
+              </a:defRPr>
+            </a:lvl3pPr>
+            <a:lvl4pPr>
+              <a:defRPr sz="975">
+                <a:solidFill>
+                  <a:srgbClr val="8DA3C0"/>
+                </a:solidFill>
+              </a:defRPr>
+            </a:lvl4pPr>
+            <a:lvl5pPr>
+              <a:defRPr sz="975">
+                <a:solidFill>
+                  <a:srgbClr val="8DA3C0"/>
+                </a:solidFill>
+              </a:defRPr>
+            </a:lvl5pPr>
+            <a:lvl6pPr>
+              <a:defRPr sz="975">
+                <a:solidFill>
+                  <a:srgbClr val="8DA3C0"/>
+                </a:solidFill>
+              </a:defRPr>
+            </a:lvl6pPr>
+            <a:lvl7pPr>
+              <a:defRPr sz="975">
+                <a:solidFill>
+                  <a:srgbClr val="8DA3C0"/>
+                </a:solidFill>
+              </a:defRPr>
+            </a:lvl7pPr>
+            <a:lvl8pPr>
+              <a:defRPr sz="975">
+                <a:solidFill>
+                  <a:srgbClr val="8DA3C0"/>
+                </a:solidFill>
+              </a:defRPr>
+            </a:lvl8pPr>
+            <a:lvl9pPr>
+              <a:defRPr sz="975">
+                <a:solidFill>
+                  <a:srgbClr val="8DA3C0"/>
+                </a:solidFill>
+              </a:defRPr>
+            </a:lvl9pPr>
+          </a:lstStyle>
+          <a:p xmlns:a="http://schemas.openxmlformats.org/drawingml/2006/main">
+            <a:pPr>
+              <a:defRPr sz="975">
+                <a:solidFill>
+                  <a:srgbClr val="8DA3C0"/>
+                </a:solidFill>
+              </a:defRPr>
+            </a:pPr>
+            <a:r>
+              <a:rPr sz="975">
+                <a:solidFill>
+                  <a:srgbClr val="8DA3C0"/>
+                </a:solidFill>
+              </a:rPr>
+              <a:t>Implementation and verification: README.md | docs/architecture.md</a:t>
             </a:r>
           </a:p>
         </p:txBody>
@@ -4768,6 +5107,7 @@
               </a:defRPr>
             </a:defPPr>
             <a:lvl1pPr>
+              <a:buNone/>
               <a:defRPr sz="3300">
                 <a:solidFill>
                   <a:srgbClr val="FFFFFF"/>
@@ -4775,6 +5115,7 @@
               </a:defRPr>
             </a:lvl1pPr>
             <a:lvl2pPr>
+              <a:buNone/>
               <a:defRPr sz="3300">
                 <a:solidFill>
                   <a:srgbClr val="FFFFFF"/>
@@ -4782,6 +5123,7 @@
               </a:defRPr>
             </a:lvl2pPr>
             <a:lvl3pPr>
+              <a:buNone/>
               <a:defRPr sz="3300">
                 <a:solidFill>
                   <a:srgbClr val="FFFFFF"/>
@@ -4789,6 +5131,7 @@
               </a:defRPr>
             </a:lvl3pPr>
             <a:lvl4pPr>
+              <a:buNone/>
               <a:defRPr sz="3300">
                 <a:solidFill>
                   <a:srgbClr val="FFFFFF"/>
@@ -4796,6 +5139,7 @@
               </a:defRPr>
             </a:lvl4pPr>
             <a:lvl5pPr>
+              <a:buNone/>
               <a:defRPr sz="3300">
                 <a:solidFill>
                   <a:srgbClr val="FFFFFF"/>
@@ -4803,6 +5147,7 @@
               </a:defRPr>
             </a:lvl5pPr>
             <a:lvl6pPr>
+              <a:buNone/>
               <a:defRPr sz="3300">
                 <a:solidFill>
                   <a:srgbClr val="FFFFFF"/>
@@ -4810,6 +5155,7 @@
               </a:defRPr>
             </a:lvl6pPr>
             <a:lvl7pPr>
+              <a:buNone/>
               <a:defRPr sz="3300">
                 <a:solidFill>
                   <a:srgbClr val="FFFFFF"/>
@@ -4817,6 +5163,7 @@
               </a:defRPr>
             </a:lvl7pPr>
             <a:lvl8pPr>
+              <a:buNone/>
               <a:defRPr sz="3300">
                 <a:solidFill>
                   <a:srgbClr val="FFFFFF"/>
@@ -4824,6 +5171,7 @@
               </a:defRPr>
             </a:lvl8pPr>
             <a:lvl9pPr>
+              <a:buNone/>
               <a:defRPr sz="3300">
                 <a:solidFill>
                   <a:srgbClr val="FFFFFF"/>
@@ -4833,6 +5181,7 @@
           </a:lstStyle>
           <a:p xmlns:a="http://schemas.openxmlformats.org/drawingml/2006/main">
             <a:pPr>
+              <a:buNone/>
               <a:defRPr sz="3300">
                 <a:solidFill>
                   <a:srgbClr val="FFFFFF"/>
@@ -4845,7 +5194,7 @@
                   <a:srgbClr val="FFFFFF"/>
                 </a:solidFill>
               </a:rPr>
-              <a:t>A2A v0.3.0 · JSON-RPC 2.0</a:t>
+              <a:t>Why A2A v0.3.0?</a:t>
             </a:r>
           </a:p>
         </p:txBody>
@@ -4888,6 +5237,7 @@
               </a:defRPr>
             </a:defPPr>
             <a:lvl1pPr>
+              <a:buNone/>
               <a:defRPr sz="1725">
                 <a:solidFill>
                   <a:srgbClr val="75E2CE"/>
@@ -4895,6 +5245,7 @@
               </a:defRPr>
             </a:lvl1pPr>
             <a:lvl2pPr>
+              <a:buNone/>
               <a:defRPr sz="1725">
                 <a:solidFill>
                   <a:srgbClr val="75E2CE"/>
@@ -4902,6 +5253,7 @@
               </a:defRPr>
             </a:lvl2pPr>
             <a:lvl3pPr>
+              <a:buNone/>
               <a:defRPr sz="1725">
                 <a:solidFill>
                   <a:srgbClr val="75E2CE"/>
@@ -4909,6 +5261,7 @@
               </a:defRPr>
             </a:lvl3pPr>
             <a:lvl4pPr>
+              <a:buNone/>
               <a:defRPr sz="1725">
                 <a:solidFill>
                   <a:srgbClr val="75E2CE"/>
@@ -4916,6 +5269,7 @@
               </a:defRPr>
             </a:lvl4pPr>
             <a:lvl5pPr>
+              <a:buNone/>
               <a:defRPr sz="1725">
                 <a:solidFill>
                   <a:srgbClr val="75E2CE"/>
@@ -4923,6 +5277,7 @@
               </a:defRPr>
             </a:lvl5pPr>
             <a:lvl6pPr>
+              <a:buNone/>
               <a:defRPr sz="1725">
                 <a:solidFill>
                   <a:srgbClr val="75E2CE"/>
@@ -4930,6 +5285,7 @@
               </a:defRPr>
             </a:lvl6pPr>
             <a:lvl7pPr>
+              <a:buNone/>
               <a:defRPr sz="1725">
                 <a:solidFill>
                   <a:srgbClr val="75E2CE"/>
@@ -4937,6 +5293,7 @@
               </a:defRPr>
             </a:lvl7pPr>
             <a:lvl8pPr>
+              <a:buNone/>
               <a:defRPr sz="1725">
                 <a:solidFill>
                   <a:srgbClr val="75E2CE"/>
@@ -4944,6 +5301,7 @@
               </a:defRPr>
             </a:lvl8pPr>
             <a:lvl9pPr>
+              <a:buNone/>
               <a:defRPr sz="1725">
                 <a:solidFill>
                   <a:srgbClr val="75E2CE"/>
@@ -4953,6 +5311,7 @@
           </a:lstStyle>
           <a:p xmlns:a="http://schemas.openxmlformats.org/drawingml/2006/main">
             <a:pPr>
+              <a:buNone/>
               <a:defRPr sz="1725">
                 <a:solidFill>
                   <a:srgbClr val="75E2CE"/>
@@ -4965,7 +5324,7 @@
                   <a:srgbClr val="75E2CE"/>
                 </a:solidFill>
               </a:rPr>
-              <a:t>A deliberate synchronous subset</a:t>
+              <a:t>Official Python SDK 0.3.26 · JSON-RPC 2.0</a:t>
             </a:r>
           </a:p>
         </p:txBody>
@@ -5008,6 +5367,7 @@
               </a:defRPr>
             </a:defPPr>
             <a:lvl1pPr>
+              <a:buNone/>
               <a:defRPr sz="2025">
                 <a:solidFill>
                   <a:srgbClr val="D3E0F0"/>
@@ -5015,6 +5375,7 @@
               </a:defRPr>
             </a:lvl1pPr>
             <a:lvl2pPr>
+              <a:buNone/>
               <a:defRPr sz="2025">
                 <a:solidFill>
                   <a:srgbClr val="D3E0F0"/>
@@ -5022,6 +5383,7 @@
               </a:defRPr>
             </a:lvl2pPr>
             <a:lvl3pPr>
+              <a:buNone/>
               <a:defRPr sz="2025">
                 <a:solidFill>
                   <a:srgbClr val="D3E0F0"/>
@@ -5029,6 +5391,7 @@
               </a:defRPr>
             </a:lvl3pPr>
             <a:lvl4pPr>
+              <a:buNone/>
               <a:defRPr sz="2025">
                 <a:solidFill>
                   <a:srgbClr val="D3E0F0"/>
@@ -5036,6 +5399,7 @@
               </a:defRPr>
             </a:lvl4pPr>
             <a:lvl5pPr>
+              <a:buNone/>
               <a:defRPr sz="2025">
                 <a:solidFill>
                   <a:srgbClr val="D3E0F0"/>
@@ -5043,6 +5407,7 @@
               </a:defRPr>
             </a:lvl5pPr>
             <a:lvl6pPr>
+              <a:buNone/>
               <a:defRPr sz="2025">
                 <a:solidFill>
                   <a:srgbClr val="D3E0F0"/>
@@ -5050,6 +5415,7 @@
               </a:defRPr>
             </a:lvl6pPr>
             <a:lvl7pPr>
+              <a:buNone/>
               <a:defRPr sz="2025">
                 <a:solidFill>
                   <a:srgbClr val="D3E0F0"/>
@@ -5057,6 +5423,7 @@
               </a:defRPr>
             </a:lvl7pPr>
             <a:lvl8pPr>
+              <a:buNone/>
               <a:defRPr sz="2025">
                 <a:solidFill>
                   <a:srgbClr val="D3E0F0"/>
@@ -5064,6 +5431,7 @@
               </a:defRPr>
             </a:lvl8pPr>
             <a:lvl9pPr>
+              <a:buNone/>
               <a:defRPr sz="2025">
                 <a:solidFill>
                   <a:srgbClr val="D3E0F0"/>
@@ -5073,6 +5441,7 @@
           </a:lstStyle>
           <a:p xmlns:a="http://schemas.openxmlformats.org/drawingml/2006/main">
             <a:pPr>
+              <a:buNone/>
               <a:defRPr sz="2025">
                 <a:solidFill>
                   <a:srgbClr val="D3E0F0"/>
@@ -5085,11 +5454,12 @@
                   <a:srgbClr val="D3E0F0"/>
                 </a:solidFill>
               </a:rPr>
-              <a:t>Agent Card advertises airline skills and OAuth metadata.</a:t>
+              <a:t>Fits cross-company capability discovery and task delegation.</a:t>
             </a:r>
           </a:p>
           <a:p xmlns:a="http://schemas.openxmlformats.org/drawingml/2006/main">
             <a:pPr>
+              <a:buNone/>
               <a:defRPr sz="2025">
                 <a:solidFill>
                   <a:srgbClr val="D3E0F0"/>
@@ -5102,11 +5472,12 @@
                   <a:srgbClr val="D3E0F0"/>
                 </a:solidFill>
               </a:rPr>
-              <a:t>DataParts carry search, book and cancel operations.</a:t>
+              <a:t>SDK client + server replace hand-written transport.</a:t>
             </a:r>
           </a:p>
           <a:p xmlns:a="http://schemas.openxmlformats.org/drawingml/2006/main">
             <a:pPr>
+              <a:buNone/>
               <a:defRPr sz="2025">
                 <a:solidFill>
                   <a:srgbClr val="D3E0F0"/>
@@ -5119,11 +5490,12 @@
                   <a:srgbClr val="D3E0F0"/>
                 </a:solidFill>
               </a:rPr>
-              <a:t>Artifacts return results; tasks/get checks ownership.</a:t>
+              <a:t>Typed messages, task IDs and result artifacts over HTTP.</a:t>
             </a:r>
           </a:p>
           <a:p xmlns:a="http://schemas.openxmlformats.org/drawingml/2006/main">
             <a:pPr>
+              <a:buNone/>
               <a:defRPr sz="2025">
                 <a:solidFill>
                   <a:srgbClr val="D3E0F0"/>
@@ -5136,7 +5508,145 @@
                   <a:srgbClr val="D3E0F0"/>
                 </a:solidFill>
               </a:rPr>
-              <a:t>Task cancellation and booking cancellation are distinct.</a:t>
+              <a:t>Pinned 0.3 wire format avoids a separate version migration.</a:t>
+            </a:r>
+          </a:p>
+          <a:p xmlns:a="http://schemas.openxmlformats.org/drawingml/2006/main">
+            <a:pPr>
+              <a:buNone/>
+              <a:defRPr sz="2025">
+                <a:solidFill>
+                  <a:srgbClr val="D3E0F0"/>
+                </a:solidFill>
+              </a:defRPr>
+            </a:pPr>
+            <a:r>
+              <a:rPr sz="2025">
+                <a:solidFill>
+                  <a:srgbClr val="D3E0F0"/>
+                </a:solidFill>
+              </a:rPr>
+              <a:t>Synchronous demo; no independent certification claimed.</a:t>
+            </a:r>
+          </a:p>
+        </p:txBody>
+      </p:sp>
+      <p:sp>
+        <p:nvSpPr>
+          <p:cNvPr id="5" name="">
+            <a:extLst xmlns:a="http://schemas.openxmlformats.org/drawingml/2006/main">
+              <a:ext uri="{FF2B5EF4-FFF2-40B4-BE49-F238E27FC236}">
+                <a16:creationId xmlns:a16="http://schemas.microsoft.com/office/drawing/2014/main" id="{0632D9BE-2D52-4B48-9DA1-9F00605DEB18}"/>
+              </a:ext>
+            </a:extLst>
+          </p:cNvPr>
+          <p:cNvSpPr>
+            <a:spLocks xmlns:a="http://schemas.openxmlformats.org/drawingml/2006/main" noGrp="1"/>
+          </p:cNvSpPr>
+          <p:nvPr/>
+        </p:nvSpPr>
+        <p:spPr>
+          <a:xfrm xmlns:a="http://schemas.openxmlformats.org/drawingml/2006/main">
+            <a:off x="762000" y="6362700"/>
+            <a:ext cx="10668000" cy="285750"/>
+          </a:xfrm>
+          <a:prstGeom xmlns:a="http://schemas.openxmlformats.org/drawingml/2006/main" prst="rect">
+            <a:avLst/>
+          </a:prstGeom>
+          <a:noFill xmlns:a="http://schemas.openxmlformats.org/drawingml/2006/main"/>
+          <a:ln xmlns:a="http://schemas.openxmlformats.org/drawingml/2006/main" w="0">
+            <a:noFill/>
+          </a:ln>
+        </p:spPr>
+        <p:txBody>
+          <a:bodyPr xmlns:a="http://schemas.openxmlformats.org/drawingml/2006/main"/>
+          <a:lstStyle xmlns:a="http://schemas.openxmlformats.org/drawingml/2006/main">
+            <a:defPPr>
+              <a:defRPr sz="975">
+                <a:solidFill>
+                  <a:srgbClr val="8DA3C0"/>
+                </a:solidFill>
+              </a:defRPr>
+            </a:defPPr>
+            <a:lvl1pPr>
+              <a:defRPr sz="975">
+                <a:solidFill>
+                  <a:srgbClr val="8DA3C0"/>
+                </a:solidFill>
+              </a:defRPr>
+            </a:lvl1pPr>
+            <a:lvl2pPr>
+              <a:defRPr sz="975">
+                <a:solidFill>
+                  <a:srgbClr val="8DA3C0"/>
+                </a:solidFill>
+              </a:defRPr>
+            </a:lvl2pPr>
+            <a:lvl3pPr>
+              <a:defRPr sz="975">
+                <a:solidFill>
+                  <a:srgbClr val="8DA3C0"/>
+                </a:solidFill>
+              </a:defRPr>
+            </a:lvl3pPr>
+            <a:lvl4pPr>
+              <a:defRPr sz="975">
+                <a:solidFill>
+                  <a:srgbClr val="8DA3C0"/>
+                </a:solidFill>
+              </a:defRPr>
+            </a:lvl4pPr>
+            <a:lvl5pPr>
+              <a:defRPr sz="975">
+                <a:solidFill>
+                  <a:srgbClr val="8DA3C0"/>
+                </a:solidFill>
+              </a:defRPr>
+            </a:lvl5pPr>
+            <a:lvl6pPr>
+              <a:defRPr sz="975">
+                <a:solidFill>
+                  <a:srgbClr val="8DA3C0"/>
+                </a:solidFill>
+              </a:defRPr>
+            </a:lvl6pPr>
+            <a:lvl7pPr>
+              <a:defRPr sz="975">
+                <a:solidFill>
+                  <a:srgbClr val="8DA3C0"/>
+                </a:solidFill>
+              </a:defRPr>
+            </a:lvl7pPr>
+            <a:lvl8pPr>
+              <a:defRPr sz="975">
+                <a:solidFill>
+                  <a:srgbClr val="8DA3C0"/>
+                </a:solidFill>
+              </a:defRPr>
+            </a:lvl8pPr>
+            <a:lvl9pPr>
+              <a:defRPr sz="975">
+                <a:solidFill>
+                  <a:srgbClr val="8DA3C0"/>
+                </a:solidFill>
+              </a:defRPr>
+            </a:lvl9pPr>
+          </a:lstStyle>
+          <a:p xmlns:a="http://schemas.openxmlformats.org/drawingml/2006/main">
+            <a:pPr>
+              <a:defRPr sz="975">
+                <a:solidFill>
+                  <a:srgbClr val="8DA3C0"/>
+                </a:solidFill>
+              </a:defRPr>
+            </a:pPr>
+            <a:r>
+              <a:rPr sz="975">
+                <a:solidFill>
+                  <a:srgbClr val="8DA3C0"/>
+                </a:solidFill>
+              </a:rPr>
+              <a:t>Sources: github.com/a2aproject/a2a-python | a2a-protocol.org/v0.3.0/specification/</a:t>
             </a:r>
           </a:p>
         </p:txBody>
@@ -5208,6 +5718,7 @@
               </a:defRPr>
             </a:defPPr>
             <a:lvl1pPr>
+              <a:buNone/>
               <a:defRPr sz="3300">
                 <a:solidFill>
                   <a:srgbClr val="FFFFFF"/>
@@ -5215,6 +5726,7 @@
               </a:defRPr>
             </a:lvl1pPr>
             <a:lvl2pPr>
+              <a:buNone/>
               <a:defRPr sz="3300">
                 <a:solidFill>
                   <a:srgbClr val="FFFFFF"/>
@@ -5222,6 +5734,7 @@
               </a:defRPr>
             </a:lvl2pPr>
             <a:lvl3pPr>
+              <a:buNone/>
               <a:defRPr sz="3300">
                 <a:solidFill>
                   <a:srgbClr val="FFFFFF"/>
@@ -5229,6 +5742,7 @@
               </a:defRPr>
             </a:lvl3pPr>
             <a:lvl4pPr>
+              <a:buNone/>
               <a:defRPr sz="3300">
                 <a:solidFill>
                   <a:srgbClr val="FFFFFF"/>
@@ -5236,6 +5750,7 @@
               </a:defRPr>
             </a:lvl4pPr>
             <a:lvl5pPr>
+              <a:buNone/>
               <a:defRPr sz="3300">
                 <a:solidFill>
                   <a:srgbClr val="FFFFFF"/>
@@ -5243,6 +5758,7 @@
               </a:defRPr>
             </a:lvl5pPr>
             <a:lvl6pPr>
+              <a:buNone/>
               <a:defRPr sz="3300">
                 <a:solidFill>
                   <a:srgbClr val="FFFFFF"/>
@@ -5250,6 +5766,7 @@
               </a:defRPr>
             </a:lvl6pPr>
             <a:lvl7pPr>
+              <a:buNone/>
               <a:defRPr sz="3300">
                 <a:solidFill>
                   <a:srgbClr val="FFFFFF"/>
@@ -5257,6 +5774,7 @@
               </a:defRPr>
             </a:lvl7pPr>
             <a:lvl8pPr>
+              <a:buNone/>
               <a:defRPr sz="3300">
                 <a:solidFill>
                   <a:srgbClr val="FFFFFF"/>
@@ -5264,6 +5782,7 @@
               </a:defRPr>
             </a:lvl8pPr>
             <a:lvl9pPr>
+              <a:buNone/>
               <a:defRPr sz="3300">
                 <a:solidFill>
                   <a:srgbClr val="FFFFFF"/>
@@ -5273,6 +5792,7 @@
           </a:lstStyle>
           <a:p xmlns:a="http://schemas.openxmlformats.org/drawingml/2006/main">
             <a:pPr>
+              <a:buNone/>
               <a:defRPr sz="3300">
                 <a:solidFill>
                   <a:srgbClr val="FFFFFF"/>
@@ -5328,6 +5848,7 @@
               </a:defRPr>
             </a:defPPr>
             <a:lvl1pPr>
+              <a:buNone/>
               <a:defRPr sz="1725">
                 <a:solidFill>
                   <a:srgbClr val="75E2CE"/>
@@ -5335,6 +5856,7 @@
               </a:defRPr>
             </a:lvl1pPr>
             <a:lvl2pPr>
+              <a:buNone/>
               <a:defRPr sz="1725">
                 <a:solidFill>
                   <a:srgbClr val="75E2CE"/>
@@ -5342,6 +5864,7 @@
               </a:defRPr>
             </a:lvl2pPr>
             <a:lvl3pPr>
+              <a:buNone/>
               <a:defRPr sz="1725">
                 <a:solidFill>
                   <a:srgbClr val="75E2CE"/>
@@ -5349,6 +5872,7 @@
               </a:defRPr>
             </a:lvl3pPr>
             <a:lvl4pPr>
+              <a:buNone/>
               <a:defRPr sz="1725">
                 <a:solidFill>
                   <a:srgbClr val="75E2CE"/>
@@ -5356,6 +5880,7 @@
               </a:defRPr>
             </a:lvl4pPr>
             <a:lvl5pPr>
+              <a:buNone/>
               <a:defRPr sz="1725">
                 <a:solidFill>
                   <a:srgbClr val="75E2CE"/>
@@ -5363,6 +5888,7 @@
               </a:defRPr>
             </a:lvl5pPr>
             <a:lvl6pPr>
+              <a:buNone/>
               <a:defRPr sz="1725">
                 <a:solidFill>
                   <a:srgbClr val="75E2CE"/>
@@ -5370,6 +5896,7 @@
               </a:defRPr>
             </a:lvl6pPr>
             <a:lvl7pPr>
+              <a:buNone/>
               <a:defRPr sz="1725">
                 <a:solidFill>
                   <a:srgbClr val="75E2CE"/>
@@ -5377,6 +5904,7 @@
               </a:defRPr>
             </a:lvl7pPr>
             <a:lvl8pPr>
+              <a:buNone/>
               <a:defRPr sz="1725">
                 <a:solidFill>
                   <a:srgbClr val="75E2CE"/>
@@ -5384,6 +5912,7 @@
               </a:defRPr>
             </a:lvl8pPr>
             <a:lvl9pPr>
+              <a:buNone/>
               <a:defRPr sz="1725">
                 <a:solidFill>
                   <a:srgbClr val="75E2CE"/>
@@ -5393,6 +5922,7 @@
           </a:lstStyle>
           <a:p xmlns:a="http://schemas.openxmlformats.org/drawingml/2006/main">
             <a:pPr>
+              <a:buNone/>
               <a:defRPr sz="1725">
                 <a:solidFill>
                   <a:srgbClr val="75E2CE"/>
@@ -5448,6 +5978,7 @@
               </a:defRPr>
             </a:defPPr>
             <a:lvl1pPr>
+              <a:buNone/>
               <a:defRPr sz="2025">
                 <a:solidFill>
                   <a:srgbClr val="D3E0F0"/>
@@ -5455,6 +5986,7 @@
               </a:defRPr>
             </a:lvl1pPr>
             <a:lvl2pPr>
+              <a:buNone/>
               <a:defRPr sz="2025">
                 <a:solidFill>
                   <a:srgbClr val="D3E0F0"/>
@@ -5462,6 +5994,7 @@
               </a:defRPr>
             </a:lvl2pPr>
             <a:lvl3pPr>
+              <a:buNone/>
               <a:defRPr sz="2025">
                 <a:solidFill>
                   <a:srgbClr val="D3E0F0"/>
@@ -5469,6 +6002,7 @@
               </a:defRPr>
             </a:lvl3pPr>
             <a:lvl4pPr>
+              <a:buNone/>
               <a:defRPr sz="2025">
                 <a:solidFill>
                   <a:srgbClr val="D3E0F0"/>
@@ -5476,6 +6010,7 @@
               </a:defRPr>
             </a:lvl4pPr>
             <a:lvl5pPr>
+              <a:buNone/>
               <a:defRPr sz="2025">
                 <a:solidFill>
                   <a:srgbClr val="D3E0F0"/>
@@ -5483,6 +6018,7 @@
               </a:defRPr>
             </a:lvl5pPr>
             <a:lvl6pPr>
+              <a:buNone/>
               <a:defRPr sz="2025">
                 <a:solidFill>
                   <a:srgbClr val="D3E0F0"/>
@@ -5490,6 +6026,7 @@
               </a:defRPr>
             </a:lvl6pPr>
             <a:lvl7pPr>
+              <a:buNone/>
               <a:defRPr sz="2025">
                 <a:solidFill>
                   <a:srgbClr val="D3E0F0"/>
@@ -5497,6 +6034,7 @@
               </a:defRPr>
             </a:lvl7pPr>
             <a:lvl8pPr>
+              <a:buNone/>
               <a:defRPr sz="2025">
                 <a:solidFill>
                   <a:srgbClr val="D3E0F0"/>
@@ -5504,6 +6042,7 @@
               </a:defRPr>
             </a:lvl8pPr>
             <a:lvl9pPr>
+              <a:buNone/>
               <a:defRPr sz="2025">
                 <a:solidFill>
                   <a:srgbClr val="D3E0F0"/>
@@ -5513,6 +6052,7 @@
           </a:lstStyle>
           <a:p xmlns:a="http://schemas.openxmlformats.org/drawingml/2006/main">
             <a:pPr>
+              <a:buNone/>
               <a:defRPr sz="2025">
                 <a:solidFill>
                   <a:srgbClr val="D3E0F0"/>
@@ -5525,11 +6065,12 @@
                   <a:srgbClr val="D3E0F0"/>
                 </a:solidFill>
               </a:rPr>
-              <a:t>A redirects the browser to Keycloak for consent.</a:t>
+              <a:t>Keycloak issues scoped, short-lived signed tokens.</a:t>
             </a:r>
           </a:p>
           <a:p xmlns:a="http://schemas.openxmlformats.org/drawingml/2006/main">
             <a:pPr>
+              <a:buNone/>
               <a:defRPr sz="2025">
                 <a:solidFill>
                   <a:srgbClr val="D3E0F0"/>
@@ -5542,11 +6083,12 @@
                   <a:srgbClr val="D3E0F0"/>
                 </a:solidFill>
               </a:rPr>
-              <a:t>State binds the callback to the session and pending operation.</a:t>
+              <a:t>B verifies signature, issuer, audience, expiry and client.</a:t>
             </a:r>
           </a:p>
           <a:p xmlns:a="http://schemas.openxmlformats.org/drawingml/2006/main">
             <a:pPr>
+              <a:buNone/>
               <a:defRPr sz="2025">
                 <a:solidFill>
                   <a:srgbClr val="D3E0F0"/>
@@ -5559,11 +6101,12 @@
                   <a:srgbClr val="D3E0F0"/>
                 </a:solidFill>
               </a:rPr>
-              <a:t>A exchanges the code and keeps the token server-side.</a:t>
+              <a:t>B derives booking owner from verified issuer + subject.</a:t>
             </a:r>
           </a:p>
           <a:p xmlns:a="http://schemas.openxmlformats.org/drawingml/2006/main">
             <a:pPr>
+              <a:buNone/>
               <a:defRPr sz="2025">
                 <a:solidFill>
                   <a:srgbClr val="D3E0F0"/>
@@ -5576,7 +6119,127 @@
                   <a:srgbClr val="D3E0F0"/>
                 </a:solidFill>
               </a:rPr>
-              <a:t>B checks signature, issuer, audience, expiry, client and scope.</a:t>
+              <a:t>New scope requires consent before A sends the operation.</a:t>
+            </a:r>
+          </a:p>
+        </p:txBody>
+      </p:sp>
+      <p:sp>
+        <p:nvSpPr>
+          <p:cNvPr id="5" name="">
+            <a:extLst xmlns:a="http://schemas.openxmlformats.org/drawingml/2006/main">
+              <a:ext uri="{FF2B5EF4-FFF2-40B4-BE49-F238E27FC236}">
+                <a16:creationId xmlns:a16="http://schemas.microsoft.com/office/drawing/2014/main" id="{D26061D8-DA38-4515-812E-FAD085DEEC12}"/>
+              </a:ext>
+            </a:extLst>
+          </p:cNvPr>
+          <p:cNvSpPr>
+            <a:spLocks xmlns:a="http://schemas.openxmlformats.org/drawingml/2006/main" noGrp="1"/>
+          </p:cNvSpPr>
+          <p:nvPr/>
+        </p:nvSpPr>
+        <p:spPr>
+          <a:xfrm xmlns:a="http://schemas.openxmlformats.org/drawingml/2006/main">
+            <a:off x="762000" y="6362700"/>
+            <a:ext cx="10668000" cy="285750"/>
+          </a:xfrm>
+          <a:prstGeom xmlns:a="http://schemas.openxmlformats.org/drawingml/2006/main" prst="rect">
+            <a:avLst/>
+          </a:prstGeom>
+          <a:noFill xmlns:a="http://schemas.openxmlformats.org/drawingml/2006/main"/>
+          <a:ln xmlns:a="http://schemas.openxmlformats.org/drawingml/2006/main" w="0">
+            <a:noFill/>
+          </a:ln>
+        </p:spPr>
+        <p:txBody>
+          <a:bodyPr xmlns:a="http://schemas.openxmlformats.org/drawingml/2006/main"/>
+          <a:lstStyle xmlns:a="http://schemas.openxmlformats.org/drawingml/2006/main">
+            <a:defPPr>
+              <a:defRPr sz="975">
+                <a:solidFill>
+                  <a:srgbClr val="8DA3C0"/>
+                </a:solidFill>
+              </a:defRPr>
+            </a:defPPr>
+            <a:lvl1pPr>
+              <a:defRPr sz="975">
+                <a:solidFill>
+                  <a:srgbClr val="8DA3C0"/>
+                </a:solidFill>
+              </a:defRPr>
+            </a:lvl1pPr>
+            <a:lvl2pPr>
+              <a:defRPr sz="975">
+                <a:solidFill>
+                  <a:srgbClr val="8DA3C0"/>
+                </a:solidFill>
+              </a:defRPr>
+            </a:lvl2pPr>
+            <a:lvl3pPr>
+              <a:defRPr sz="975">
+                <a:solidFill>
+                  <a:srgbClr val="8DA3C0"/>
+                </a:solidFill>
+              </a:defRPr>
+            </a:lvl3pPr>
+            <a:lvl4pPr>
+              <a:defRPr sz="975">
+                <a:solidFill>
+                  <a:srgbClr val="8DA3C0"/>
+                </a:solidFill>
+              </a:defRPr>
+            </a:lvl4pPr>
+            <a:lvl5pPr>
+              <a:defRPr sz="975">
+                <a:solidFill>
+                  <a:srgbClr val="8DA3C0"/>
+                </a:solidFill>
+              </a:defRPr>
+            </a:lvl5pPr>
+            <a:lvl6pPr>
+              <a:defRPr sz="975">
+                <a:solidFill>
+                  <a:srgbClr val="8DA3C0"/>
+                </a:solidFill>
+              </a:defRPr>
+            </a:lvl6pPr>
+            <a:lvl7pPr>
+              <a:defRPr sz="975">
+                <a:solidFill>
+                  <a:srgbClr val="8DA3C0"/>
+                </a:solidFill>
+              </a:defRPr>
+            </a:lvl7pPr>
+            <a:lvl8pPr>
+              <a:defRPr sz="975">
+                <a:solidFill>
+                  <a:srgbClr val="8DA3C0"/>
+                </a:solidFill>
+              </a:defRPr>
+            </a:lvl8pPr>
+            <a:lvl9pPr>
+              <a:defRPr sz="975">
+                <a:solidFill>
+                  <a:srgbClr val="8DA3C0"/>
+                </a:solidFill>
+              </a:defRPr>
+            </a:lvl9pPr>
+          </a:lstStyle>
+          <a:p xmlns:a="http://schemas.openxmlformats.org/drawingml/2006/main">
+            <a:pPr>
+              <a:defRPr sz="975">
+                <a:solidFill>
+                  <a:srgbClr val="8DA3C0"/>
+                </a:solidFill>
+              </a:defRPr>
+            </a:pPr>
+            <a:r>
+              <a:rPr sz="975">
+                <a:solidFill>
+                  <a:srgbClr val="8DA3C0"/>
+                </a:solidFill>
+              </a:rPr>
+              <a:t>Implementation and verification: README.md | docs/architecture.md</a:t>
             </a:r>
           </a:p>
         </p:txBody>
@@ -5648,6 +6311,7 @@
               </a:defRPr>
             </a:defPPr>
             <a:lvl1pPr>
+              <a:buNone/>
               <a:defRPr sz="3300">
                 <a:solidFill>
                   <a:srgbClr val="FFFFFF"/>
@@ -5655,6 +6319,7 @@
               </a:defRPr>
             </a:lvl1pPr>
             <a:lvl2pPr>
+              <a:buNone/>
               <a:defRPr sz="3300">
                 <a:solidFill>
                   <a:srgbClr val="FFFFFF"/>
@@ -5662,6 +6327,7 @@
               </a:defRPr>
             </a:lvl2pPr>
             <a:lvl3pPr>
+              <a:buNone/>
               <a:defRPr sz="3300">
                 <a:solidFill>
                   <a:srgbClr val="FFFFFF"/>
@@ -5669,6 +6335,7 @@
               </a:defRPr>
             </a:lvl3pPr>
             <a:lvl4pPr>
+              <a:buNone/>
               <a:defRPr sz="3300">
                 <a:solidFill>
                   <a:srgbClr val="FFFFFF"/>
@@ -5676,6 +6343,7 @@
               </a:defRPr>
             </a:lvl4pPr>
             <a:lvl5pPr>
+              <a:buNone/>
               <a:defRPr sz="3300">
                 <a:solidFill>
                   <a:srgbClr val="FFFFFF"/>
@@ -5683,6 +6351,7 @@
               </a:defRPr>
             </a:lvl5pPr>
             <a:lvl6pPr>
+              <a:buNone/>
               <a:defRPr sz="3300">
                 <a:solidFill>
                   <a:srgbClr val="FFFFFF"/>
@@ -5690,6 +6359,7 @@
               </a:defRPr>
             </a:lvl6pPr>
             <a:lvl7pPr>
+              <a:buNone/>
               <a:defRPr sz="3300">
                 <a:solidFill>
                   <a:srgbClr val="FFFFFF"/>
@@ -5697,6 +6367,7 @@
               </a:defRPr>
             </a:lvl7pPr>
             <a:lvl8pPr>
+              <a:buNone/>
               <a:defRPr sz="3300">
                 <a:solidFill>
                   <a:srgbClr val="FFFFFF"/>
@@ -5704,6 +6375,7 @@
               </a:defRPr>
             </a:lvl8pPr>
             <a:lvl9pPr>
+              <a:buNone/>
               <a:defRPr sz="3300">
                 <a:solidFill>
                   <a:srgbClr val="FFFFFF"/>
@@ -5713,6 +6385,7 @@
           </a:lstStyle>
           <a:p xmlns:a="http://schemas.openxmlformats.org/drawingml/2006/main">
             <a:pPr>
+              <a:buNone/>
               <a:defRPr sz="3300">
                 <a:solidFill>
                   <a:srgbClr val="FFFFFF"/>
@@ -5725,7 +6398,7 @@
                   <a:srgbClr val="FFFFFF"/>
                 </a:solidFill>
               </a:rPr>
-              <a:t>LangGraph makes pauses explicit</a:t>
+              <a:t>Both agents choose native tools</a:t>
             </a:r>
           </a:p>
         </p:txBody>
@@ -5768,6 +6441,7 @@
               </a:defRPr>
             </a:defPPr>
             <a:lvl1pPr>
+              <a:buNone/>
               <a:defRPr sz="1725">
                 <a:solidFill>
                   <a:srgbClr val="75E2CE"/>
@@ -5775,6 +6449,7 @@
               </a:defRPr>
             </a:lvl1pPr>
             <a:lvl2pPr>
+              <a:buNone/>
               <a:defRPr sz="1725">
                 <a:solidFill>
                   <a:srgbClr val="75E2CE"/>
@@ -5782,6 +6457,7 @@
               </a:defRPr>
             </a:lvl2pPr>
             <a:lvl3pPr>
+              <a:buNone/>
               <a:defRPr sz="1725">
                 <a:solidFill>
                   <a:srgbClr val="75E2CE"/>
@@ -5789,6 +6465,7 @@
               </a:defRPr>
             </a:lvl3pPr>
             <a:lvl4pPr>
+              <a:buNone/>
               <a:defRPr sz="1725">
                 <a:solidFill>
                   <a:srgbClr val="75E2CE"/>
@@ -5796,6 +6473,7 @@
               </a:defRPr>
             </a:lvl4pPr>
             <a:lvl5pPr>
+              <a:buNone/>
               <a:defRPr sz="1725">
                 <a:solidFill>
                   <a:srgbClr val="75E2CE"/>
@@ -5803,6 +6481,7 @@
               </a:defRPr>
             </a:lvl5pPr>
             <a:lvl6pPr>
+              <a:buNone/>
               <a:defRPr sz="1725">
                 <a:solidFill>
                   <a:srgbClr val="75E2CE"/>
@@ -5810,6 +6489,7 @@
               </a:defRPr>
             </a:lvl6pPr>
             <a:lvl7pPr>
+              <a:buNone/>
               <a:defRPr sz="1725">
                 <a:solidFill>
                   <a:srgbClr val="75E2CE"/>
@@ -5817,6 +6497,7 @@
               </a:defRPr>
             </a:lvl7pPr>
             <a:lvl8pPr>
+              <a:buNone/>
               <a:defRPr sz="1725">
                 <a:solidFill>
                   <a:srgbClr val="75E2CE"/>
@@ -5824,6 +6505,7 @@
               </a:defRPr>
             </a:lvl8pPr>
             <a:lvl9pPr>
+              <a:buNone/>
               <a:defRPr sz="1725">
                 <a:solidFill>
                   <a:srgbClr val="75E2CE"/>
@@ -5833,6 +6515,7 @@
           </a:lstStyle>
           <a:p xmlns:a="http://schemas.openxmlformats.org/drawingml/2006/main">
             <a:pPr>
+              <a:buNone/>
               <a:defRPr sz="1725">
                 <a:solidFill>
                   <a:srgbClr val="75E2CE"/>
@@ -5845,7 +6528,7 @@
                   <a:srgbClr val="75E2CE"/>
                 </a:solidFill>
               </a:rPr>
-              <a:t>Consent → search → confirm → execute</a:t>
+              <a:t>LangGraph reason → tools → reason, bounded to five steps</a:t>
             </a:r>
           </a:p>
         </p:txBody>
@@ -5888,6 +6571,7 @@
               </a:defRPr>
             </a:defPPr>
             <a:lvl1pPr>
+              <a:buNone/>
               <a:defRPr sz="2025">
                 <a:solidFill>
                   <a:srgbClr val="D3E0F0"/>
@@ -5895,6 +6579,7 @@
               </a:defRPr>
             </a:lvl1pPr>
             <a:lvl2pPr>
+              <a:buNone/>
               <a:defRPr sz="2025">
                 <a:solidFill>
                   <a:srgbClr val="D3E0F0"/>
@@ -5902,6 +6587,7 @@
               </a:defRPr>
             </a:lvl2pPr>
             <a:lvl3pPr>
+              <a:buNone/>
               <a:defRPr sz="2025">
                 <a:solidFill>
                   <a:srgbClr val="D3E0F0"/>
@@ -5909,6 +6595,7 @@
               </a:defRPr>
             </a:lvl3pPr>
             <a:lvl4pPr>
+              <a:buNone/>
               <a:defRPr sz="2025">
                 <a:solidFill>
                   <a:srgbClr val="D3E0F0"/>
@@ -5916,6 +6603,7 @@
               </a:defRPr>
             </a:lvl4pPr>
             <a:lvl5pPr>
+              <a:buNone/>
               <a:defRPr sz="2025">
                 <a:solidFill>
                   <a:srgbClr val="D3E0F0"/>
@@ -5923,6 +6611,7 @@
               </a:defRPr>
             </a:lvl5pPr>
             <a:lvl6pPr>
+              <a:buNone/>
               <a:defRPr sz="2025">
                 <a:solidFill>
                   <a:srgbClr val="D3E0F0"/>
@@ -5930,6 +6619,7 @@
               </a:defRPr>
             </a:lvl6pPr>
             <a:lvl7pPr>
+              <a:buNone/>
               <a:defRPr sz="2025">
                 <a:solidFill>
                   <a:srgbClr val="D3E0F0"/>
@@ -5937,6 +6627,7 @@
               </a:defRPr>
             </a:lvl7pPr>
             <a:lvl8pPr>
+              <a:buNone/>
               <a:defRPr sz="2025">
                 <a:solidFill>
                   <a:srgbClr val="D3E0F0"/>
@@ -5944,6 +6635,7 @@
               </a:defRPr>
             </a:lvl8pPr>
             <a:lvl9pPr>
+              <a:buNone/>
               <a:defRPr sz="2025">
                 <a:solidFill>
                   <a:srgbClr val="D3E0F0"/>
@@ -5953,6 +6645,7 @@
           </a:lstStyle>
           <a:p xmlns:a="http://schemas.openxmlformats.org/drawingml/2006/main">
             <a:pPr>
+              <a:buNone/>
               <a:defRPr sz="2025">
                 <a:solidFill>
                   <a:srgbClr val="D3E0F0"/>
@@ -5965,11 +6658,12 @@
                   <a:srgbClr val="D3E0F0"/>
                 </a:solidFill>
               </a:rPr>
-              <a:t>A interrupts for OAuth and concrete itinerary approval.</a:t>
+              <a:t>A: discover / search / request booking / cancel by reference</a:t>
             </a:r>
           </a:p>
           <a:p xmlns:a="http://schemas.openxmlformats.org/drawingml/2006/main">
             <a:pPr>
+              <a:buNone/>
               <a:defRPr sz="2025">
                 <a:solidFill>
                   <a:srgbClr val="D3E0F0"/>
@@ -5982,11 +6676,12 @@
                   <a:srgbClr val="D3E0F0"/>
                 </a:solidFill>
               </a:rPr>
-              <a:t>The same graph resumes after each browser interaction.</a:t>
+              <a:t>B: inspect / search inventory / create / cancel reservation</a:t>
             </a:r>
           </a:p>
           <a:p xmlns:a="http://schemas.openxmlformats.org/drawingml/2006/main">
             <a:pPr>
+              <a:buNone/>
               <a:defRPr sz="2025">
                 <a:solidFill>
                   <a:srgbClr val="D3E0F0"/>
@@ -5999,11 +6694,12 @@
                   <a:srgbClr val="D3E0F0"/>
                 </a:solidFill>
               </a:rPr>
-              <a:t>B uses a small deterministic execution graph.</a:t>
+              <a:t>A pauses for OAuth and explicit purchase approval.</a:t>
             </a:r>
           </a:p>
           <a:p xmlns:a="http://schemas.openxmlformats.org/drawingml/2006/main">
             <a:pPr>
+              <a:buNone/>
               <a:defRPr sz="2025">
                 <a:solidFill>
                   <a:srgbClr val="D3E0F0"/>
@@ -6016,7 +6712,145 @@
                   <a:srgbClr val="D3E0F0"/>
                 </a:solidFill>
               </a:rPr>
-              <a:t>Models never decide authorization or booking ownership.</a:t>
+              <a:t>B checks exact delegation arguments before mutation.</a:t>
+            </a:r>
+          </a:p>
+          <a:p xmlns:a="http://schemas.openxmlformats.org/drawingml/2006/main">
+            <a:pPr>
+              <a:buNone/>
+              <a:defRPr sz="2025">
+                <a:solidFill>
+                  <a:srgbClr val="D3E0F0"/>
+                </a:solidFill>
+              </a:defRPr>
+            </a:pPr>
+            <a:r>
+              <a:rPr sz="2025">
+                <a:solidFill>
+                  <a:srgbClr val="D3E0F0"/>
+                </a:solidFill>
+              </a:rPr>
+              <a:t>25 tests pass; live SDK booking/cancellation smoke passed.</a:t>
+            </a:r>
+          </a:p>
+        </p:txBody>
+      </p:sp>
+      <p:sp>
+        <p:nvSpPr>
+          <p:cNvPr id="5" name="">
+            <a:extLst xmlns:a="http://schemas.openxmlformats.org/drawingml/2006/main">
+              <a:ext uri="{FF2B5EF4-FFF2-40B4-BE49-F238E27FC236}">
+                <a16:creationId xmlns:a16="http://schemas.microsoft.com/office/drawing/2014/main" id="{AAEB0465-5A67-49D7-9FFA-4653340C2546}"/>
+              </a:ext>
+            </a:extLst>
+          </p:cNvPr>
+          <p:cNvSpPr>
+            <a:spLocks xmlns:a="http://schemas.openxmlformats.org/drawingml/2006/main" noGrp="1"/>
+          </p:cNvSpPr>
+          <p:nvPr/>
+        </p:nvSpPr>
+        <p:spPr>
+          <a:xfrm xmlns:a="http://schemas.openxmlformats.org/drawingml/2006/main">
+            <a:off x="762000" y="6362700"/>
+            <a:ext cx="10668000" cy="285750"/>
+          </a:xfrm>
+          <a:prstGeom xmlns:a="http://schemas.openxmlformats.org/drawingml/2006/main" prst="rect">
+            <a:avLst/>
+          </a:prstGeom>
+          <a:noFill xmlns:a="http://schemas.openxmlformats.org/drawingml/2006/main"/>
+          <a:ln xmlns:a="http://schemas.openxmlformats.org/drawingml/2006/main" w="0">
+            <a:noFill/>
+          </a:ln>
+        </p:spPr>
+        <p:txBody>
+          <a:bodyPr xmlns:a="http://schemas.openxmlformats.org/drawingml/2006/main"/>
+          <a:lstStyle xmlns:a="http://schemas.openxmlformats.org/drawingml/2006/main">
+            <a:defPPr>
+              <a:defRPr sz="975">
+                <a:solidFill>
+                  <a:srgbClr val="8DA3C0"/>
+                </a:solidFill>
+              </a:defRPr>
+            </a:defPPr>
+            <a:lvl1pPr>
+              <a:defRPr sz="975">
+                <a:solidFill>
+                  <a:srgbClr val="8DA3C0"/>
+                </a:solidFill>
+              </a:defRPr>
+            </a:lvl1pPr>
+            <a:lvl2pPr>
+              <a:defRPr sz="975">
+                <a:solidFill>
+                  <a:srgbClr val="8DA3C0"/>
+                </a:solidFill>
+              </a:defRPr>
+            </a:lvl2pPr>
+            <a:lvl3pPr>
+              <a:defRPr sz="975">
+                <a:solidFill>
+                  <a:srgbClr val="8DA3C0"/>
+                </a:solidFill>
+              </a:defRPr>
+            </a:lvl3pPr>
+            <a:lvl4pPr>
+              <a:defRPr sz="975">
+                <a:solidFill>
+                  <a:srgbClr val="8DA3C0"/>
+                </a:solidFill>
+              </a:defRPr>
+            </a:lvl4pPr>
+            <a:lvl5pPr>
+              <a:defRPr sz="975">
+                <a:solidFill>
+                  <a:srgbClr val="8DA3C0"/>
+                </a:solidFill>
+              </a:defRPr>
+            </a:lvl5pPr>
+            <a:lvl6pPr>
+              <a:defRPr sz="975">
+                <a:solidFill>
+                  <a:srgbClr val="8DA3C0"/>
+                </a:solidFill>
+              </a:defRPr>
+            </a:lvl6pPr>
+            <a:lvl7pPr>
+              <a:defRPr sz="975">
+                <a:solidFill>
+                  <a:srgbClr val="8DA3C0"/>
+                </a:solidFill>
+              </a:defRPr>
+            </a:lvl7pPr>
+            <a:lvl8pPr>
+              <a:defRPr sz="975">
+                <a:solidFill>
+                  <a:srgbClr val="8DA3C0"/>
+                </a:solidFill>
+              </a:defRPr>
+            </a:lvl8pPr>
+            <a:lvl9pPr>
+              <a:defRPr sz="975">
+                <a:solidFill>
+                  <a:srgbClr val="8DA3C0"/>
+                </a:solidFill>
+              </a:defRPr>
+            </a:lvl9pPr>
+          </a:lstStyle>
+          <a:p xmlns:a="http://schemas.openxmlformats.org/drawingml/2006/main">
+            <a:pPr>
+              <a:defRPr sz="975">
+                <a:solidFill>
+                  <a:srgbClr val="8DA3C0"/>
+                </a:solidFill>
+              </a:defRPr>
+            </a:pPr>
+            <a:r>
+              <a:rPr sz="975">
+                <a:solidFill>
+                  <a:srgbClr val="8DA3C0"/>
+                </a:solidFill>
+              </a:rPr>
+              <a:t>Implementation and verification: README.md | docs/architecture.md</a:t>
             </a:r>
           </a:p>
         </p:txBody>
@@ -6088,6 +6922,7 @@
               </a:defRPr>
             </a:defPPr>
             <a:lvl1pPr>
+              <a:buNone/>
               <a:defRPr sz="3300">
                 <a:solidFill>
                   <a:srgbClr val="FFFFFF"/>
@@ -6095,6 +6930,7 @@
               </a:defRPr>
             </a:lvl1pPr>
             <a:lvl2pPr>
+              <a:buNone/>
               <a:defRPr sz="3300">
                 <a:solidFill>
                   <a:srgbClr val="FFFFFF"/>
@@ -6102,6 +6938,7 @@
               </a:defRPr>
             </a:lvl2pPr>
             <a:lvl3pPr>
+              <a:buNone/>
               <a:defRPr sz="3300">
                 <a:solidFill>
                   <a:srgbClr val="FFFFFF"/>
@@ -6109,6 +6946,7 @@
               </a:defRPr>
             </a:lvl3pPr>
             <a:lvl4pPr>
+              <a:buNone/>
               <a:defRPr sz="3300">
                 <a:solidFill>
                   <a:srgbClr val="FFFFFF"/>
@@ -6116,6 +6954,7 @@
               </a:defRPr>
             </a:lvl4pPr>
             <a:lvl5pPr>
+              <a:buNone/>
               <a:defRPr sz="3300">
                 <a:solidFill>
                   <a:srgbClr val="FFFFFF"/>
@@ -6123,6 +6962,7 @@
               </a:defRPr>
             </a:lvl5pPr>
             <a:lvl6pPr>
+              <a:buNone/>
               <a:defRPr sz="3300">
                 <a:solidFill>
                   <a:srgbClr val="FFFFFF"/>
@@ -6130,6 +6970,7 @@
               </a:defRPr>
             </a:lvl6pPr>
             <a:lvl7pPr>
+              <a:buNone/>
               <a:defRPr sz="3300">
                 <a:solidFill>
                   <a:srgbClr val="FFFFFF"/>
@@ -6137,6 +6978,7 @@
               </a:defRPr>
             </a:lvl7pPr>
             <a:lvl8pPr>
+              <a:buNone/>
               <a:defRPr sz="3300">
                 <a:solidFill>
                   <a:srgbClr val="FFFFFF"/>
@@ -6144,6 +6986,7 @@
               </a:defRPr>
             </a:lvl8pPr>
             <a:lvl9pPr>
+              <a:buNone/>
               <a:defRPr sz="3300">
                 <a:solidFill>
                   <a:srgbClr val="FFFFFF"/>
@@ -6153,6 +6996,7 @@
           </a:lstStyle>
           <a:p xmlns:a="http://schemas.openxmlformats.org/drawingml/2006/main">
             <a:pPr>
+              <a:buNone/>
               <a:defRPr sz="3300">
                 <a:solidFill>
                   <a:srgbClr val="FFFFFF"/>
@@ -6165,7 +7009,7 @@
                   <a:srgbClr val="FFFFFF"/>
                 </a:solidFill>
               </a:rPr>
-              <a:t>Book first. Ask again before cancelling.</a:t>
+              <a:t>Show the boundary, end to end</a:t>
             </a:r>
           </a:p>
         </p:txBody>
@@ -6208,6 +7052,7 @@
               </a:defRPr>
             </a:defPPr>
             <a:lvl1pPr>
+              <a:buNone/>
               <a:defRPr sz="1725">
                 <a:solidFill>
                   <a:srgbClr val="75E2CE"/>
@@ -6215,6 +7060,7 @@
               </a:defRPr>
             </a:lvl1pPr>
             <a:lvl2pPr>
+              <a:buNone/>
               <a:defRPr sz="1725">
                 <a:solidFill>
                   <a:srgbClr val="75E2CE"/>
@@ -6222,6 +7068,7 @@
               </a:defRPr>
             </a:lvl2pPr>
             <a:lvl3pPr>
+              <a:buNone/>
               <a:defRPr sz="1725">
                 <a:solidFill>
                   <a:srgbClr val="75E2CE"/>
@@ -6229,6 +7076,7 @@
               </a:defRPr>
             </a:lvl3pPr>
             <a:lvl4pPr>
+              <a:buNone/>
               <a:defRPr sz="1725">
                 <a:solidFill>
                   <a:srgbClr val="75E2CE"/>
@@ -6236,6 +7084,7 @@
               </a:defRPr>
             </a:lvl4pPr>
             <a:lvl5pPr>
+              <a:buNone/>
               <a:defRPr sz="1725">
                 <a:solidFill>
                   <a:srgbClr val="75E2CE"/>
@@ -6243,6 +7092,7 @@
               </a:defRPr>
             </a:lvl5pPr>
             <a:lvl6pPr>
+              <a:buNone/>
               <a:defRPr sz="1725">
                 <a:solidFill>
                   <a:srgbClr val="75E2CE"/>
@@ -6250,6 +7100,7 @@
               </a:defRPr>
             </a:lvl6pPr>
             <a:lvl7pPr>
+              <a:buNone/>
               <a:defRPr sz="1725">
                 <a:solidFill>
                   <a:srgbClr val="75E2CE"/>
@@ -6257,6 +7108,7 @@
               </a:defRPr>
             </a:lvl7pPr>
             <a:lvl8pPr>
+              <a:buNone/>
               <a:defRPr sz="1725">
                 <a:solidFill>
                   <a:srgbClr val="75E2CE"/>
@@ -6264,6 +7116,7 @@
               </a:defRPr>
             </a:lvl8pPr>
             <a:lvl9pPr>
+              <a:buNone/>
               <a:defRPr sz="1725">
                 <a:solidFill>
                   <a:srgbClr val="75E2CE"/>
@@ -6273,6 +7126,7 @@
           </a:lstStyle>
           <a:p xmlns:a="http://schemas.openxmlformats.org/drawingml/2006/main">
             <a:pPr>
+              <a:buNone/>
               <a:defRPr sz="1725">
                 <a:solidFill>
                   <a:srgbClr val="75E2CE"/>
@@ -6328,6 +7182,7 @@
               </a:defRPr>
             </a:defPPr>
             <a:lvl1pPr>
+              <a:buNone/>
               <a:defRPr sz="2025">
                 <a:solidFill>
                   <a:srgbClr val="D3E0F0"/>
@@ -6335,6 +7190,7 @@
               </a:defRPr>
             </a:lvl1pPr>
             <a:lvl2pPr>
+              <a:buNone/>
               <a:defRPr sz="2025">
                 <a:solidFill>
                   <a:srgbClr val="D3E0F0"/>
@@ -6342,6 +7198,7 @@
               </a:defRPr>
             </a:lvl2pPr>
             <a:lvl3pPr>
+              <a:buNone/>
               <a:defRPr sz="2025">
                 <a:solidFill>
                   <a:srgbClr val="D3E0F0"/>
@@ -6349,6 +7206,7 @@
               </a:defRPr>
             </a:lvl3pPr>
             <a:lvl4pPr>
+              <a:buNone/>
               <a:defRPr sz="2025">
                 <a:solidFill>
                   <a:srgbClr val="D3E0F0"/>
@@ -6356,6 +7214,7 @@
               </a:defRPr>
             </a:lvl4pPr>
             <a:lvl5pPr>
+              <a:buNone/>
               <a:defRPr sz="2025">
                 <a:solidFill>
                   <a:srgbClr val="D3E0F0"/>
@@ -6363,6 +7222,7 @@
               </a:defRPr>
             </a:lvl5pPr>
             <a:lvl6pPr>
+              <a:buNone/>
               <a:defRPr sz="2025">
                 <a:solidFill>
                   <a:srgbClr val="D3E0F0"/>
@@ -6370,6 +7230,7 @@
               </a:defRPr>
             </a:lvl6pPr>
             <a:lvl7pPr>
+              <a:buNone/>
               <a:defRPr sz="2025">
                 <a:solidFill>
                   <a:srgbClr val="D3E0F0"/>
@@ -6377,6 +7238,7 @@
               </a:defRPr>
             </a:lvl7pPr>
             <a:lvl8pPr>
+              <a:buNone/>
               <a:defRPr sz="2025">
                 <a:solidFill>
                   <a:srgbClr val="D3E0F0"/>
@@ -6384,6 +7246,7 @@
               </a:defRPr>
             </a:lvl8pPr>
             <a:lvl9pPr>
+              <a:buNone/>
               <a:defRPr sz="2025">
                 <a:solidFill>
                   <a:srgbClr val="D3E0F0"/>
@@ -6393,6 +7256,7 @@
           </a:lstStyle>
           <a:p xmlns:a="http://schemas.openxmlformats.org/drawingml/2006/main">
             <a:pPr>
+              <a:buNone/>
               <a:defRPr sz="2025">
                 <a:solidFill>
                   <a:srgbClr val="D3E0F0"/>
@@ -6405,11 +7269,12 @@
                   <a:srgbClr val="D3E0F0"/>
                 </a:solidFill>
               </a:rPr>
-              <a:t>Initial grant: flights:search + flights:book.</a:t>
+              <a:t>Search-only: grant search, return options, no booking.</a:t>
             </a:r>
           </a:p>
           <a:p xmlns:a="http://schemas.openxmlformats.org/drawingml/2006/main">
             <a:pPr>
+              <a:buNone/>
               <a:defRPr sz="2025">
                 <a:solidFill>
                   <a:srgbClr val="D3E0F0"/>
@@ -6422,11 +7287,12 @@
                   <a:srgbClr val="D3E0F0"/>
                 </a:solidFill>
               </a:rPr>
-              <a:t>B records the verified token subject as booking owner.</a:t>
+              <a:t>Booking: grant book, approve purchase, B confirms.</a:t>
             </a:r>
           </a:p>
           <a:p xmlns:a="http://schemas.openxmlformats.org/drawingml/2006/main">
             <a:pPr>
+              <a:buNone/>
               <a:defRPr sz="2025">
                 <a:solidFill>
                   <a:srgbClr val="D3E0F0"/>
@@ -6439,11 +7305,12 @@
                   <a:srgbClr val="D3E0F0"/>
                 </a:solidFill>
               </a:rPr>
-              <a:t>“Cancel it” triggers a fresh flights:cancel consent.</a:t>
+              <a:t>Cancellation: fresh cancel consent, B checks ownership.</a:t>
             </a:r>
           </a:p>
           <a:p xmlns:a="http://schemas.openxmlformats.org/drawingml/2006/main">
             <a:pPr>
+              <a:buNone/>
               <a:defRPr sz="2025">
                 <a:solidFill>
                   <a:srgbClr val="D3E0F0"/>
@@ -6456,7 +7323,145 @@
                   <a:srgbClr val="D3E0F0"/>
                 </a:solidFill>
               </a:rPr>
-              <a:t>A sends no cancellation request before approval.</a:t>
+              <a:t>Dashboard shows authoritative status and event history.</a:t>
+            </a:r>
+          </a:p>
+          <a:p xmlns:a="http://schemas.openxmlformats.org/drawingml/2006/main">
+            <a:pPr>
+              <a:buNone/>
+              <a:defRPr sz="2025">
+                <a:solidFill>
+                  <a:srgbClr val="D3E0F0"/>
+                </a:solidFill>
+              </a:defRPr>
+            </a:pPr>
+            <a:r>
+              <a:rPr sz="2025">
+                <a:solidFill>
+                  <a:srgbClr val="D3E0F0"/>
+                </a:solidFill>
+              </a:rPr>
+              <a:t>Sessions reset on restart; synthetic flights; local HTTP.</a:t>
+            </a:r>
+          </a:p>
+        </p:txBody>
+      </p:sp>
+      <p:sp>
+        <p:nvSpPr>
+          <p:cNvPr id="5" name="">
+            <a:extLst xmlns:a="http://schemas.openxmlformats.org/drawingml/2006/main">
+              <a:ext uri="{FF2B5EF4-FFF2-40B4-BE49-F238E27FC236}">
+                <a16:creationId xmlns:a16="http://schemas.microsoft.com/office/drawing/2014/main" id="{557EC6F9-DF6A-4E0F-AF1E-5B4B585A2B3D}"/>
+              </a:ext>
+            </a:extLst>
+          </p:cNvPr>
+          <p:cNvSpPr>
+            <a:spLocks xmlns:a="http://schemas.openxmlformats.org/drawingml/2006/main" noGrp="1"/>
+          </p:cNvSpPr>
+          <p:nvPr/>
+        </p:nvSpPr>
+        <p:spPr>
+          <a:xfrm xmlns:a="http://schemas.openxmlformats.org/drawingml/2006/main">
+            <a:off x="762000" y="6362700"/>
+            <a:ext cx="10668000" cy="285750"/>
+          </a:xfrm>
+          <a:prstGeom xmlns:a="http://schemas.openxmlformats.org/drawingml/2006/main" prst="rect">
+            <a:avLst/>
+          </a:prstGeom>
+          <a:noFill xmlns:a="http://schemas.openxmlformats.org/drawingml/2006/main"/>
+          <a:ln xmlns:a="http://schemas.openxmlformats.org/drawingml/2006/main" w="0">
+            <a:noFill/>
+          </a:ln>
+        </p:spPr>
+        <p:txBody>
+          <a:bodyPr xmlns:a="http://schemas.openxmlformats.org/drawingml/2006/main"/>
+          <a:lstStyle xmlns:a="http://schemas.openxmlformats.org/drawingml/2006/main">
+            <a:defPPr>
+              <a:defRPr sz="975">
+                <a:solidFill>
+                  <a:srgbClr val="8DA3C0"/>
+                </a:solidFill>
+              </a:defRPr>
+            </a:defPPr>
+            <a:lvl1pPr>
+              <a:defRPr sz="975">
+                <a:solidFill>
+                  <a:srgbClr val="8DA3C0"/>
+                </a:solidFill>
+              </a:defRPr>
+            </a:lvl1pPr>
+            <a:lvl2pPr>
+              <a:defRPr sz="975">
+                <a:solidFill>
+                  <a:srgbClr val="8DA3C0"/>
+                </a:solidFill>
+              </a:defRPr>
+            </a:lvl2pPr>
+            <a:lvl3pPr>
+              <a:defRPr sz="975">
+                <a:solidFill>
+                  <a:srgbClr val="8DA3C0"/>
+                </a:solidFill>
+              </a:defRPr>
+            </a:lvl3pPr>
+            <a:lvl4pPr>
+              <a:defRPr sz="975">
+                <a:solidFill>
+                  <a:srgbClr val="8DA3C0"/>
+                </a:solidFill>
+              </a:defRPr>
+            </a:lvl4pPr>
+            <a:lvl5pPr>
+              <a:defRPr sz="975">
+                <a:solidFill>
+                  <a:srgbClr val="8DA3C0"/>
+                </a:solidFill>
+              </a:defRPr>
+            </a:lvl5pPr>
+            <a:lvl6pPr>
+              <a:defRPr sz="975">
+                <a:solidFill>
+                  <a:srgbClr val="8DA3C0"/>
+                </a:solidFill>
+              </a:defRPr>
+            </a:lvl6pPr>
+            <a:lvl7pPr>
+              <a:defRPr sz="975">
+                <a:solidFill>
+                  <a:srgbClr val="8DA3C0"/>
+                </a:solidFill>
+              </a:defRPr>
+            </a:lvl7pPr>
+            <a:lvl8pPr>
+              <a:defRPr sz="975">
+                <a:solidFill>
+                  <a:srgbClr val="8DA3C0"/>
+                </a:solidFill>
+              </a:defRPr>
+            </a:lvl8pPr>
+            <a:lvl9pPr>
+              <a:defRPr sz="975">
+                <a:solidFill>
+                  <a:srgbClr val="8DA3C0"/>
+                </a:solidFill>
+              </a:defRPr>
+            </a:lvl9pPr>
+          </a:lstStyle>
+          <a:p xmlns:a="http://schemas.openxmlformats.org/drawingml/2006/main">
+            <a:pPr>
+              <a:defRPr sz="975">
+                <a:solidFill>
+                  <a:srgbClr val="8DA3C0"/>
+                </a:solidFill>
+              </a:defRPr>
+            </a:pPr>
+            <a:r>
+              <a:rPr sz="975">
+                <a:solidFill>
+                  <a:srgbClr val="8DA3C0"/>
+                </a:solidFill>
+              </a:rPr>
+              <a:t>Implementation and verification: README.md | docs/architecture.md</a:t>
             </a:r>
           </a:p>
         </p:txBody>
@@ -6528,6 +7533,7 @@
               </a:defRPr>
             </a:defPPr>
             <a:lvl1pPr>
+              <a:buNone/>
               <a:defRPr sz="3300">
                 <a:solidFill>
                   <a:srgbClr val="FFFFFF"/>
@@ -6535,6 +7541,7 @@
               </a:defRPr>
             </a:lvl1pPr>
             <a:lvl2pPr>
+              <a:buNone/>
               <a:defRPr sz="3300">
                 <a:solidFill>
                   <a:srgbClr val="FFFFFF"/>
@@ -6542,6 +7549,7 @@
               </a:defRPr>
             </a:lvl2pPr>
             <a:lvl3pPr>
+              <a:buNone/>
               <a:defRPr sz="3300">
                 <a:solidFill>
                   <a:srgbClr val="FFFFFF"/>
@@ -6549,6 +7557,7 @@
               </a:defRPr>
             </a:lvl3pPr>
             <a:lvl4pPr>
+              <a:buNone/>
               <a:defRPr sz="3300">
                 <a:solidFill>
                   <a:srgbClr val="FFFFFF"/>
@@ -6556,6 +7565,7 @@
               </a:defRPr>
             </a:lvl4pPr>
             <a:lvl5pPr>
+              <a:buNone/>
               <a:defRPr sz="3300">
                 <a:solidFill>
                   <a:srgbClr val="FFFFFF"/>
@@ -6563,6 +7573,7 @@
               </a:defRPr>
             </a:lvl5pPr>
             <a:lvl6pPr>
+              <a:buNone/>
               <a:defRPr sz="3300">
                 <a:solidFill>
                   <a:srgbClr val="FFFFFF"/>
@@ -6570,6 +7581,7 @@
               </a:defRPr>
             </a:lvl6pPr>
             <a:lvl7pPr>
+              <a:buNone/>
               <a:defRPr sz="3300">
                 <a:solidFill>
                   <a:srgbClr val="FFFFFF"/>
@@ -6577,6 +7589,7 @@
               </a:defRPr>
             </a:lvl7pPr>
             <a:lvl8pPr>
+              <a:buNone/>
               <a:defRPr sz="3300">
                 <a:solidFill>
                   <a:srgbClr val="FFFFFF"/>
@@ -6584,6 +7597,7 @@
               </a:defRPr>
             </a:lvl8pPr>
             <a:lvl9pPr>
+              <a:buNone/>
               <a:defRPr sz="3300">
                 <a:solidFill>
                   <a:srgbClr val="FFFFFF"/>
@@ -6593,6 +7607,7 @@
           </a:lstStyle>
           <a:p xmlns:a="http://schemas.openxmlformats.org/drawingml/2006/main">
             <a:pPr>
+              <a:buNone/>
               <a:defRPr sz="3300">
                 <a:solidFill>
                   <a:srgbClr val="FFFFFF"/>
@@ -6605,7 +7620,7 @@
                   <a:srgbClr val="FFFFFF"/>
                 </a:solidFill>
               </a:rPr>
-              <a:t>Security checks have executable evidence</a:t>
+              <a:t>Measured classification choice</a:t>
             </a:r>
           </a:p>
         </p:txBody>
@@ -6648,6 +7663,7 @@
               </a:defRPr>
             </a:defPPr>
             <a:lvl1pPr>
+              <a:buNone/>
               <a:defRPr sz="1725">
                 <a:solidFill>
                   <a:srgbClr val="75E2CE"/>
@@ -6655,6 +7671,7 @@
               </a:defRPr>
             </a:lvl1pPr>
             <a:lvl2pPr>
+              <a:buNone/>
               <a:defRPr sz="1725">
                 <a:solidFill>
                   <a:srgbClr val="75E2CE"/>
@@ -6662,6 +7679,7 @@
               </a:defRPr>
             </a:lvl2pPr>
             <a:lvl3pPr>
+              <a:buNone/>
               <a:defRPr sz="1725">
                 <a:solidFill>
                   <a:srgbClr val="75E2CE"/>
@@ -6669,6 +7687,7 @@
               </a:defRPr>
             </a:lvl3pPr>
             <a:lvl4pPr>
+              <a:buNone/>
               <a:defRPr sz="1725">
                 <a:solidFill>
                   <a:srgbClr val="75E2CE"/>
@@ -6676,6 +7695,7 @@
               </a:defRPr>
             </a:lvl4pPr>
             <a:lvl5pPr>
+              <a:buNone/>
               <a:defRPr sz="1725">
                 <a:solidFill>
                   <a:srgbClr val="75E2CE"/>
@@ -6683,6 +7703,7 @@
               </a:defRPr>
             </a:lvl5pPr>
             <a:lvl6pPr>
+              <a:buNone/>
               <a:defRPr sz="1725">
                 <a:solidFill>
                   <a:srgbClr val="75E2CE"/>
@@ -6690,6 +7711,7 @@
               </a:defRPr>
             </a:lvl6pPr>
             <a:lvl7pPr>
+              <a:buNone/>
               <a:defRPr sz="1725">
                 <a:solidFill>
                   <a:srgbClr val="75E2CE"/>
@@ -6697,6 +7719,7 @@
               </a:defRPr>
             </a:lvl7pPr>
             <a:lvl8pPr>
+              <a:buNone/>
               <a:defRPr sz="1725">
                 <a:solidFill>
                   <a:srgbClr val="75E2CE"/>
@@ -6704,6 +7727,7 @@
               </a:defRPr>
             </a:lvl8pPr>
             <a:lvl9pPr>
+              <a:buNone/>
               <a:defRPr sz="1725">
                 <a:solidFill>
                   <a:srgbClr val="75E2CE"/>
@@ -6713,6 +7737,7 @@
           </a:lstStyle>
           <a:p xmlns:a="http://schemas.openxmlformats.org/drawingml/2006/main">
             <a:pPr>
+              <a:buNone/>
               <a:defRPr sz="1725">
                 <a:solidFill>
                   <a:srgbClr val="75E2CE"/>
@@ -6725,7 +7750,7 @@
                   <a:srgbClr val="75E2CE"/>
                 </a:solidFill>
               </a:rPr>
-              <a:t>Automated HTTP tests + live walkthrough</a:t>
+              <a:t>8 synthetic cases/model · 30 Oct 2026 · one pass</a:t>
             </a:r>
           </a:p>
         </p:txBody>
@@ -6746,8 +7771,8 @@
         </p:nvSpPr>
         <p:spPr>
           <a:xfrm xmlns:a="http://schemas.openxmlformats.org/drawingml/2006/main">
-            <a:off x="762000" y="3143250"/>
-            <a:ext cx="10668000" cy="2857500"/>
+            <a:off x="762000" y="5238750"/>
+            <a:ext cx="10668000" cy="904875"/>
           </a:xfrm>
           <a:prstGeom xmlns:a="http://schemas.openxmlformats.org/drawingml/2006/main" prst="rect">
             <a:avLst/>
@@ -6761,13 +7786,14 @@
           <a:bodyPr xmlns:a="http://schemas.openxmlformats.org/drawingml/2006/main"/>
           <a:lstStyle xmlns:a="http://schemas.openxmlformats.org/drawingml/2006/main">
             <a:defPPr>
-              <a:defRPr sz="2025">
+              <a:defRPr sz="1650">
                 <a:solidFill>
                   <a:srgbClr val="D3E0F0"/>
                 </a:solidFill>
               </a:defRPr>
             </a:defPPr>
             <a:lvl1pPr>
+              <a:buNone/>
               <a:defRPr sz="2025">
                 <a:solidFill>
                   <a:srgbClr val="D3E0F0"/>
@@ -6775,6 +7801,7 @@
               </a:defRPr>
             </a:lvl1pPr>
             <a:lvl2pPr>
+              <a:buNone/>
               <a:defRPr sz="2025">
                 <a:solidFill>
                   <a:srgbClr val="D3E0F0"/>
@@ -6782,6 +7809,7 @@
               </a:defRPr>
             </a:lvl2pPr>
             <a:lvl3pPr>
+              <a:buNone/>
               <a:defRPr sz="2025">
                 <a:solidFill>
                   <a:srgbClr val="D3E0F0"/>
@@ -6789,6 +7817,7 @@
               </a:defRPr>
             </a:lvl3pPr>
             <a:lvl4pPr>
+              <a:buNone/>
               <a:defRPr sz="2025">
                 <a:solidFill>
                   <a:srgbClr val="D3E0F0"/>
@@ -6796,6 +7825,7 @@
               </a:defRPr>
             </a:lvl4pPr>
             <a:lvl5pPr>
+              <a:buNone/>
               <a:defRPr sz="2025">
                 <a:solidFill>
                   <a:srgbClr val="D3E0F0"/>
@@ -6803,6 +7833,7 @@
               </a:defRPr>
             </a:lvl5pPr>
             <a:lvl6pPr>
+              <a:buNone/>
               <a:defRPr sz="2025">
                 <a:solidFill>
                   <a:srgbClr val="D3E0F0"/>
@@ -6810,6 +7841,7 @@
               </a:defRPr>
             </a:lvl6pPr>
             <a:lvl7pPr>
+              <a:buNone/>
               <a:defRPr sz="2025">
                 <a:solidFill>
                   <a:srgbClr val="D3E0F0"/>
@@ -6817,6 +7849,7 @@
               </a:defRPr>
             </a:lvl7pPr>
             <a:lvl8pPr>
+              <a:buNone/>
               <a:defRPr sz="2025">
                 <a:solidFill>
                   <a:srgbClr val="D3E0F0"/>
@@ -6824,6 +7857,7 @@
               </a:defRPr>
             </a:lvl8pPr>
             <a:lvl9pPr>
+              <a:buNone/>
               <a:defRPr sz="2025">
                 <a:solidFill>
                   <a:srgbClr val="D3E0F0"/>
@@ -6833,70 +7867,532 @@
           </a:lstStyle>
           <a:p xmlns:a="http://schemas.openxmlformats.org/drawingml/2006/main">
             <a:pPr>
-              <a:defRPr sz="2025">
+              <a:buNone/>
+              <a:defRPr sz="1650">
                 <a:solidFill>
                   <a:srgbClr val="D3E0F0"/>
                 </a:solidFill>
               </a:defRPr>
             </a:pPr>
             <a:r>
-              <a:rPr sz="2025">
+              <a:rPr sz="1650">
                 <a:solidFill>
                   <a:srgbClr val="D3E0F0"/>
                 </a:solidFill>
               </a:rPr>
-              <a:t>Signed test tokens cover bad claims and forged signatures.</a:t>
+              <a:t>Choose Jev: matched Haiku accuracy at lower latency/cost.</a:t>
             </a:r>
           </a:p>
           <a:p xmlns:a="http://schemas.openxmlformats.org/drawingml/2006/main">
             <a:pPr>
-              <a:defRPr sz="2025">
+              <a:buNone/>
+              <a:defRPr sz="1650">
                 <a:solidFill>
                   <a:srgbClr val="D3E0F0"/>
                 </a:solidFill>
               </a:defRPr>
             </a:pPr>
             <a:r>
-              <a:rPr sz="2025">
+              <a:rPr sz="1650">
                 <a:solidFill>
                   <a:srgbClr val="D3E0F0"/>
                 </a:solidFill>
               </a:rPr>
-              <a:t>Tests cover missing scopes, owner isolation and retry safety.</a:t>
+              <a:t>*Gemini had one HTTP failure; cost covers 7 calls only.</a:t>
             </a:r>
           </a:p>
+        </p:txBody>
+      </p:sp>
+      <p:graphicFrame>
+        <p:nvGraphicFramePr>
+          <p:cNvPr id="5" name="">
+            <a:extLst xmlns:a="http://schemas.openxmlformats.org/drawingml/2006/main">
+              <a:ext uri="{FF2B5EF4-FFF2-40B4-BE49-F238E27FC236}">
+                <a16:creationId xmlns:a16="http://schemas.microsoft.com/office/drawing/2014/main" id="{777D8184-EE51-4BFD-BAE1-067069144B89}"/>
+              </a:ext>
+            </a:extLst>
+          </p:cNvPr>
+          <p:cNvGraphicFramePr/>
+          <p:nvPr/>
+        </p:nvGraphicFramePr>
+        <p:xfrm>
+          <a:off xmlns:a="http://schemas.openxmlformats.org/drawingml/2006/main" x="762000" y="3048000"/>
+          <a:ext xmlns:a="http://schemas.openxmlformats.org/drawingml/2006/main" cx="10668000" cy="1905000"/>
+        </p:xfrm>
+        <a:graphic xmlns:a="http://schemas.openxmlformats.org/drawingml/2006/main">
+          <a:graphicData uri="http://schemas.openxmlformats.org/drawingml/2006/table">
+            <a:tbl>
+              <a:tblPr/>
+              <a:tblGrid>
+                <a:gridCol w="3619500"/>
+                <a:gridCol w="1619250"/>
+                <a:gridCol w="2190750"/>
+                <a:gridCol w="3238500"/>
+              </a:tblGrid>
+              <a:tr h="476250">
+                <a:tc>
+                  <a:txBody>
+                    <a:bodyPr/>
+                    <a:lstStyle/>
+                    <a:p>
+                      <a:r>
+                        <a:rPr sz="1725" b="1">
+                          <a:solidFill>
+                            <a:srgbClr val="75E2CE"/>
+                          </a:solidFill>
+                        </a:rPr>
+                        <a:t>Model</a:t>
+                      </a:r>
+                    </a:p>
+                  </a:txBody>
+                  <a:tcPr marL="91440" marR="91440" marT="45720" marB="45720">
+                    <a:solidFill>
+                      <a:srgbClr val="1D3048"/>
+                    </a:solidFill>
+                  </a:tcPr>
+                </a:tc>
+                <a:tc>
+                  <a:txBody>
+                    <a:bodyPr/>
+                    <a:lstStyle/>
+                    <a:p>
+                      <a:r>
+                        <a:rPr sz="1725" b="1">
+                          <a:solidFill>
+                            <a:srgbClr val="75E2CE"/>
+                          </a:solidFill>
+                        </a:rPr>
+                        <a:t>Correct</a:t>
+                      </a:r>
+                    </a:p>
+                  </a:txBody>
+                  <a:tcPr marL="91440" marR="91440" marT="45720" marB="45720">
+                    <a:solidFill>
+                      <a:srgbClr val="1D3048"/>
+                    </a:solidFill>
+                  </a:tcPr>
+                </a:tc>
+                <a:tc>
+                  <a:txBody>
+                    <a:bodyPr/>
+                    <a:lstStyle/>
+                    <a:p>
+                      <a:r>
+                        <a:rPr sz="1725" b="1">
+                          <a:solidFill>
+                            <a:srgbClr val="75E2CE"/>
+                          </a:solidFill>
+                        </a:rPr>
+                        <a:t>Median</a:t>
+                      </a:r>
+                    </a:p>
+                  </a:txBody>
+                  <a:tcPr marL="91440" marR="91440" marT="45720" marB="45720">
+                    <a:solidFill>
+                      <a:srgbClr val="1D3048"/>
+                    </a:solidFill>
+                  </a:tcPr>
+                </a:tc>
+                <a:tc>
+                  <a:txBody>
+                    <a:bodyPr/>
+                    <a:lstStyle/>
+                    <a:p>
+                      <a:r>
+                        <a:rPr sz="1725" b="1">
+                          <a:solidFill>
+                            <a:srgbClr val="75E2CE"/>
+                          </a:solidFill>
+                        </a:rPr>
+                        <a:t>Inference cost</a:t>
+                      </a:r>
+                    </a:p>
+                  </a:txBody>
+                  <a:tcPr marL="91440" marR="91440" marT="45720" marB="45720">
+                    <a:solidFill>
+                      <a:srgbClr val="1D3048"/>
+                    </a:solidFill>
+                  </a:tcPr>
+                </a:tc>
+              </a:tr>
+              <a:tr h="476250">
+                <a:tc>
+                  <a:txBody>
+                    <a:bodyPr/>
+                    <a:lstStyle/>
+                    <a:p>
+                      <a:r>
+                        <a:rPr sz="1725" b="0">
+                          <a:solidFill>
+                            <a:srgbClr val="D3E0F0"/>
+                          </a:solidFill>
+                        </a:rPr>
+                        <a:t>Jev 1.13</a:t>
+                      </a:r>
+                    </a:p>
+                  </a:txBody>
+                  <a:tcPr marL="91440" marR="91440" marT="45720" marB="45720">
+                    <a:solidFill>
+                      <a:srgbClr val="101B2D"/>
+                    </a:solidFill>
+                  </a:tcPr>
+                </a:tc>
+                <a:tc>
+                  <a:txBody>
+                    <a:bodyPr/>
+                    <a:lstStyle/>
+                    <a:p>
+                      <a:r>
+                        <a:rPr sz="1725" b="0">
+                          <a:solidFill>
+                            <a:srgbClr val="D3E0F0"/>
+                          </a:solidFill>
+                        </a:rPr>
+                        <a:t>8/8</a:t>
+                      </a:r>
+                    </a:p>
+                  </a:txBody>
+                  <a:tcPr marL="91440" marR="91440" marT="45720" marB="45720">
+                    <a:solidFill>
+                      <a:srgbClr val="101B2D"/>
+                    </a:solidFill>
+                  </a:tcPr>
+                </a:tc>
+                <a:tc>
+                  <a:txBody>
+                    <a:bodyPr/>
+                    <a:lstStyle/>
+                    <a:p>
+                      <a:r>
+                        <a:rPr sz="1725" b="0">
+                          <a:solidFill>
+                            <a:srgbClr val="D3E0F0"/>
+                          </a:solidFill>
+                        </a:rPr>
+                        <a:t>1.582 s</a:t>
+                      </a:r>
+                    </a:p>
+                  </a:txBody>
+                  <a:tcPr marL="91440" marR="91440" marT="45720" marB="45720">
+                    <a:solidFill>
+                      <a:srgbClr val="101B2D"/>
+                    </a:solidFill>
+                  </a:tcPr>
+                </a:tc>
+                <a:tc>
+                  <a:txBody>
+                    <a:bodyPr/>
+                    <a:lstStyle/>
+                    <a:p>
+                      <a:r>
+                        <a:rPr sz="1725" b="0">
+                          <a:solidFill>
+                            <a:srgbClr val="D3E0F0"/>
+                          </a:solidFill>
+                        </a:rPr>
+                        <a:t>$0.00013314</a:t>
+                      </a:r>
+                    </a:p>
+                  </a:txBody>
+                  <a:tcPr marL="91440" marR="91440" marT="45720" marB="45720">
+                    <a:solidFill>
+                      <a:srgbClr val="101B2D"/>
+                    </a:solidFill>
+                  </a:tcPr>
+                </a:tc>
+              </a:tr>
+              <a:tr h="476250">
+                <a:tc>
+                  <a:txBody>
+                    <a:bodyPr/>
+                    <a:lstStyle/>
+                    <a:p>
+                      <a:r>
+                        <a:rPr sz="1725" b="0">
+                          <a:solidFill>
+                            <a:srgbClr val="D3E0F0"/>
+                          </a:solidFill>
+                        </a:rPr>
+                        <a:t>Haiku 4.5</a:t>
+                      </a:r>
+                    </a:p>
+                  </a:txBody>
+                  <a:tcPr marL="91440" marR="91440" marT="45720" marB="45720">
+                    <a:solidFill>
+                      <a:srgbClr val="101B2D"/>
+                    </a:solidFill>
+                  </a:tcPr>
+                </a:tc>
+                <a:tc>
+                  <a:txBody>
+                    <a:bodyPr/>
+                    <a:lstStyle/>
+                    <a:p>
+                      <a:r>
+                        <a:rPr sz="1725" b="0">
+                          <a:solidFill>
+                            <a:srgbClr val="D3E0F0"/>
+                          </a:solidFill>
+                        </a:rPr>
+                        <a:t>8/8</a:t>
+                      </a:r>
+                    </a:p>
+                  </a:txBody>
+                  <a:tcPr marL="91440" marR="91440" marT="45720" marB="45720">
+                    <a:solidFill>
+                      <a:srgbClr val="101B2D"/>
+                    </a:solidFill>
+                  </a:tcPr>
+                </a:tc>
+                <a:tc>
+                  <a:txBody>
+                    <a:bodyPr/>
+                    <a:lstStyle/>
+                    <a:p>
+                      <a:r>
+                        <a:rPr sz="1725" b="0">
+                          <a:solidFill>
+                            <a:srgbClr val="D3E0F0"/>
+                          </a:solidFill>
+                        </a:rPr>
+                        <a:t>1.796 s</a:t>
+                      </a:r>
+                    </a:p>
+                  </a:txBody>
+                  <a:tcPr marL="91440" marR="91440" marT="45720" marB="45720">
+                    <a:solidFill>
+                      <a:srgbClr val="101B2D"/>
+                    </a:solidFill>
+                  </a:tcPr>
+                </a:tc>
+                <a:tc>
+                  <a:txBody>
+                    <a:bodyPr/>
+                    <a:lstStyle/>
+                    <a:p>
+                      <a:r>
+                        <a:rPr sz="1725" b="0">
+                          <a:solidFill>
+                            <a:srgbClr val="D3E0F0"/>
+                          </a:solidFill>
+                        </a:rPr>
+                        <a:t>$0.00196000</a:t>
+                      </a:r>
+                    </a:p>
+                  </a:txBody>
+                  <a:tcPr marL="91440" marR="91440" marT="45720" marB="45720">
+                    <a:solidFill>
+                      <a:srgbClr val="101B2D"/>
+                    </a:solidFill>
+                  </a:tcPr>
+                </a:tc>
+              </a:tr>
+              <a:tr h="476250">
+                <a:tc>
+                  <a:txBody>
+                    <a:bodyPr/>
+                    <a:lstStyle/>
+                    <a:p>
+                      <a:r>
+                        <a:rPr sz="1725" b="0">
+                          <a:solidFill>
+                            <a:srgbClr val="D3E0F0"/>
+                          </a:solidFill>
+                        </a:rPr>
+                        <a:t>Gemini Flash Lite</a:t>
+                      </a:r>
+                    </a:p>
+                  </a:txBody>
+                  <a:tcPr marL="91440" marR="91440" marT="45720" marB="45720">
+                    <a:solidFill>
+                      <a:srgbClr val="101B2D"/>
+                    </a:solidFill>
+                  </a:tcPr>
+                </a:tc>
+                <a:tc>
+                  <a:txBody>
+                    <a:bodyPr/>
+                    <a:lstStyle/>
+                    <a:p>
+                      <a:r>
+                        <a:rPr sz="1725" b="0">
+                          <a:solidFill>
+                            <a:srgbClr val="D3E0F0"/>
+                          </a:solidFill>
+                        </a:rPr>
+                        <a:t>7/8</a:t>
+                      </a:r>
+                    </a:p>
+                  </a:txBody>
+                  <a:tcPr marL="91440" marR="91440" marT="45720" marB="45720">
+                    <a:solidFill>
+                      <a:srgbClr val="101B2D"/>
+                    </a:solidFill>
+                  </a:tcPr>
+                </a:tc>
+                <a:tc>
+                  <a:txBody>
+                    <a:bodyPr/>
+                    <a:lstStyle/>
+                    <a:p>
+                      <a:r>
+                        <a:rPr sz="1725" b="0">
+                          <a:solidFill>
+                            <a:srgbClr val="D3E0F0"/>
+                          </a:solidFill>
+                        </a:rPr>
+                        <a:t>1.950 s</a:t>
+                      </a:r>
+                    </a:p>
+                  </a:txBody>
+                  <a:tcPr marL="91440" marR="91440" marT="45720" marB="45720">
+                    <a:solidFill>
+                      <a:srgbClr val="101B2D"/>
+                    </a:solidFill>
+                  </a:tcPr>
+                </a:tc>
+                <a:tc>
+                  <a:txBody>
+                    <a:bodyPr/>
+                    <a:lstStyle/>
+                    <a:p>
+                      <a:r>
+                        <a:rPr sz="1725" b="0">
+                          <a:solidFill>
+                            <a:srgbClr val="D3E0F0"/>
+                          </a:solidFill>
+                        </a:rPr>
+                        <a:t>$0.00013290*</a:t>
+                      </a:r>
+                    </a:p>
+                  </a:txBody>
+                  <a:tcPr marL="91440" marR="91440" marT="45720" marB="45720">
+                    <a:solidFill>
+                      <a:srgbClr val="101B2D"/>
+                    </a:solidFill>
+                  </a:tcPr>
+                </a:tc>
+              </a:tr>
+            </a:tbl>
+          </a:graphicData>
+        </a:graphic>
+      </p:graphicFrame>
+      <p:sp>
+        <p:nvSpPr>
+          <p:cNvPr id="6" name="">
+            <a:extLst xmlns:a="http://schemas.openxmlformats.org/drawingml/2006/main">
+              <a:ext uri="{FF2B5EF4-FFF2-40B4-BE49-F238E27FC236}">
+                <a16:creationId xmlns:a16="http://schemas.microsoft.com/office/drawing/2014/main" id="{0E59E069-49E0-43A1-93C0-82F693008892}"/>
+              </a:ext>
+            </a:extLst>
+          </p:cNvPr>
+          <p:cNvSpPr>
+            <a:spLocks xmlns:a="http://schemas.openxmlformats.org/drawingml/2006/main" noGrp="1"/>
+          </p:cNvSpPr>
+          <p:nvPr/>
+        </p:nvSpPr>
+        <p:spPr>
+          <a:xfrm xmlns:a="http://schemas.openxmlformats.org/drawingml/2006/main">
+            <a:off x="762000" y="6362700"/>
+            <a:ext cx="10668000" cy="285750"/>
+          </a:xfrm>
+          <a:prstGeom xmlns:a="http://schemas.openxmlformats.org/drawingml/2006/main" prst="rect">
+            <a:avLst/>
+          </a:prstGeom>
+          <a:noFill xmlns:a="http://schemas.openxmlformats.org/drawingml/2006/main"/>
+          <a:ln xmlns:a="http://schemas.openxmlformats.org/drawingml/2006/main" w="0">
+            <a:noFill/>
+          </a:ln>
+        </p:spPr>
+        <p:txBody>
+          <a:bodyPr xmlns:a="http://schemas.openxmlformats.org/drawingml/2006/main"/>
+          <a:lstStyle xmlns:a="http://schemas.openxmlformats.org/drawingml/2006/main">
+            <a:defPPr>
+              <a:defRPr sz="975">
+                <a:solidFill>
+                  <a:srgbClr val="8DA3C0"/>
+                </a:solidFill>
+              </a:defRPr>
+            </a:defPPr>
+            <a:lvl1pPr>
+              <a:defRPr sz="975">
+                <a:solidFill>
+                  <a:srgbClr val="8DA3C0"/>
+                </a:solidFill>
+              </a:defRPr>
+            </a:lvl1pPr>
+            <a:lvl2pPr>
+              <a:defRPr sz="975">
+                <a:solidFill>
+                  <a:srgbClr val="8DA3C0"/>
+                </a:solidFill>
+              </a:defRPr>
+            </a:lvl2pPr>
+            <a:lvl3pPr>
+              <a:defRPr sz="975">
+                <a:solidFill>
+                  <a:srgbClr val="8DA3C0"/>
+                </a:solidFill>
+              </a:defRPr>
+            </a:lvl3pPr>
+            <a:lvl4pPr>
+              <a:defRPr sz="975">
+                <a:solidFill>
+                  <a:srgbClr val="8DA3C0"/>
+                </a:solidFill>
+              </a:defRPr>
+            </a:lvl4pPr>
+            <a:lvl5pPr>
+              <a:defRPr sz="975">
+                <a:solidFill>
+                  <a:srgbClr val="8DA3C0"/>
+                </a:solidFill>
+              </a:defRPr>
+            </a:lvl5pPr>
+            <a:lvl6pPr>
+              <a:defRPr sz="975">
+                <a:solidFill>
+                  <a:srgbClr val="8DA3C0"/>
+                </a:solidFill>
+              </a:defRPr>
+            </a:lvl6pPr>
+            <a:lvl7pPr>
+              <a:defRPr sz="975">
+                <a:solidFill>
+                  <a:srgbClr val="8DA3C0"/>
+                </a:solidFill>
+              </a:defRPr>
+            </a:lvl7pPr>
+            <a:lvl8pPr>
+              <a:defRPr sz="975">
+                <a:solidFill>
+                  <a:srgbClr val="8DA3C0"/>
+                </a:solidFill>
+              </a:defRPr>
+            </a:lvl8pPr>
+            <a:lvl9pPr>
+              <a:defRPr sz="975">
+                <a:solidFill>
+                  <a:srgbClr val="8DA3C0"/>
+                </a:solidFill>
+              </a:defRPr>
+            </a:lvl9pPr>
+          </a:lstStyle>
           <a:p xmlns:a="http://schemas.openxmlformats.org/drawingml/2006/main">
             <a:pPr>
-              <a:defRPr sz="2025">
-                <a:solidFill>
-                  <a:srgbClr val="D3E0F0"/>
+              <a:defRPr sz="975">
+                <a:solidFill>
+                  <a:srgbClr val="8DA3C0"/>
                 </a:solidFill>
               </a:defRPr>
             </a:pPr>
             <a:r>
-              <a:rPr sz="2025">
-                <a:solidFill>
-                  <a:srgbClr val="D3E0F0"/>
+              <a:rPr sz="975">
+                <a:solidFill>
+                  <a:srgbClr val="8DA3C0"/>
                 </a:solidFill>
               </a:rPr>
-              <a:t>The browser / Keycloak run is a separate acceptance check.</a:t>
-            </a:r>
-          </a:p>
-          <a:p xmlns:a="http://schemas.openxmlformats.org/drawingml/2006/main">
-            <a:pPr>
-              <a:defRPr sz="2025">
-                <a:solidFill>
-                  <a:srgbClr val="D3E0F0"/>
-                </a:solidFill>
-              </a:defRPr>
-            </a:pPr>
-            <a:r>
-              <a:rPr sz="2025">
-                <a:solidFill>
-                  <a:srgbClr val="D3E0F0"/>
-                </a:solidFill>
-              </a:rPr>
-              <a:t>OpenRouter model quality and latency need a live API key.</a:t>
+              <a:t>Source: docs/model-comparison.md + raw JSON | one-pass fixtures; no statistical significance</a:t>
             </a:r>
           </a:p>
         </p:txBody>
@@ -6968,6 +8464,7 @@
               </a:defRPr>
             </a:defPPr>
             <a:lvl1pPr>
+              <a:buNone/>
               <a:defRPr sz="3300">
                 <a:solidFill>
                   <a:srgbClr val="FFFFFF"/>
@@ -6975,6 +8472,7 @@
               </a:defRPr>
             </a:lvl1pPr>
             <a:lvl2pPr>
+              <a:buNone/>
               <a:defRPr sz="3300">
                 <a:solidFill>
                   <a:srgbClr val="FFFFFF"/>
@@ -6982,6 +8480,7 @@
               </a:defRPr>
             </a:lvl2pPr>
             <a:lvl3pPr>
+              <a:buNone/>
               <a:defRPr sz="3300">
                 <a:solidFill>
                   <a:srgbClr val="FFFFFF"/>
@@ -6989,6 +8488,7 @@
               </a:defRPr>
             </a:lvl3pPr>
             <a:lvl4pPr>
+              <a:buNone/>
               <a:defRPr sz="3300">
                 <a:solidFill>
                   <a:srgbClr val="FFFFFF"/>
@@ -6996,6 +8496,7 @@
               </a:defRPr>
             </a:lvl4pPr>
             <a:lvl5pPr>
+              <a:buNone/>
               <a:defRPr sz="3300">
                 <a:solidFill>
                   <a:srgbClr val="FFFFFF"/>
@@ -7003,6 +8504,7 @@
               </a:defRPr>
             </a:lvl5pPr>
             <a:lvl6pPr>
+              <a:buNone/>
               <a:defRPr sz="3300">
                 <a:solidFill>
                   <a:srgbClr val="FFFFFF"/>
@@ -7010,6 +8512,7 @@
               </a:defRPr>
             </a:lvl6pPr>
             <a:lvl7pPr>
+              <a:buNone/>
               <a:defRPr sz="3300">
                 <a:solidFill>
                   <a:srgbClr val="FFFFFF"/>
@@ -7017,6 +8520,7 @@
               </a:defRPr>
             </a:lvl7pPr>
             <a:lvl8pPr>
+              <a:buNone/>
               <a:defRPr sz="3300">
                 <a:solidFill>
                   <a:srgbClr val="FFFFFF"/>
@@ -7024,6 +8528,7 @@
               </a:defRPr>
             </a:lvl8pPr>
             <a:lvl9pPr>
+              <a:buNone/>
               <a:defRPr sz="3300">
                 <a:solidFill>
                   <a:srgbClr val="FFFFFF"/>
@@ -7033,6 +8538,7 @@
           </a:lstStyle>
           <a:p xmlns:a="http://schemas.openxmlformats.org/drawingml/2006/main">
             <a:pPr>
+              <a:buNone/>
               <a:defRPr sz="3300">
                 <a:solidFill>
                   <a:srgbClr val="FFFFFF"/>
@@ -7045,7 +8551,7 @@
                   <a:srgbClr val="FFFFFF"/>
                 </a:solidFill>
               </a:rPr>
-              <a:t>Small enough to explain honestly</a:t>
+              <a:t>Measured tool-selection choice</a:t>
             </a:r>
           </a:p>
         </p:txBody>
@@ -7088,6 +8594,7 @@
               </a:defRPr>
             </a:defPPr>
             <a:lvl1pPr>
+              <a:buNone/>
               <a:defRPr sz="1725">
                 <a:solidFill>
                   <a:srgbClr val="75E2CE"/>
@@ -7095,6 +8602,7 @@
               </a:defRPr>
             </a:lvl1pPr>
             <a:lvl2pPr>
+              <a:buNone/>
               <a:defRPr sz="1725">
                 <a:solidFill>
                   <a:srgbClr val="75E2CE"/>
@@ -7102,6 +8610,7 @@
               </a:defRPr>
             </a:lvl2pPr>
             <a:lvl3pPr>
+              <a:buNone/>
               <a:defRPr sz="1725">
                 <a:solidFill>
                   <a:srgbClr val="75E2CE"/>
@@ -7109,6 +8618,7 @@
               </a:defRPr>
             </a:lvl3pPr>
             <a:lvl4pPr>
+              <a:buNone/>
               <a:defRPr sz="1725">
                 <a:solidFill>
                   <a:srgbClr val="75E2CE"/>
@@ -7116,6 +8626,7 @@
               </a:defRPr>
             </a:lvl4pPr>
             <a:lvl5pPr>
+              <a:buNone/>
               <a:defRPr sz="1725">
                 <a:solidFill>
                   <a:srgbClr val="75E2CE"/>
@@ -7123,6 +8634,7 @@
               </a:defRPr>
             </a:lvl5pPr>
             <a:lvl6pPr>
+              <a:buNone/>
               <a:defRPr sz="1725">
                 <a:solidFill>
                   <a:srgbClr val="75E2CE"/>
@@ -7130,6 +8642,7 @@
               </a:defRPr>
             </a:lvl6pPr>
             <a:lvl7pPr>
+              <a:buNone/>
               <a:defRPr sz="1725">
                 <a:solidFill>
                   <a:srgbClr val="75E2CE"/>
@@ -7137,6 +8650,7 @@
               </a:defRPr>
             </a:lvl7pPr>
             <a:lvl8pPr>
+              <a:buNone/>
               <a:defRPr sz="1725">
                 <a:solidFill>
                   <a:srgbClr val="75E2CE"/>
@@ -7144,6 +8658,7 @@
               </a:defRPr>
             </a:lvl8pPr>
             <a:lvl9pPr>
+              <a:buNone/>
               <a:defRPr sz="1725">
                 <a:solidFill>
                   <a:srgbClr val="75E2CE"/>
@@ -7153,6 +8668,7 @@
           </a:lstStyle>
           <a:p xmlns:a="http://schemas.openxmlformats.org/drawingml/2006/main">
             <a:pPr>
+              <a:buNone/>
               <a:defRPr sz="1725">
                 <a:solidFill>
                   <a:srgbClr val="75E2CE"/>
@@ -7165,7 +8681,7 @@
                   <a:srgbClr val="75E2CE"/>
                 </a:solidFill>
               </a:rPr>
-              <a:t>Tradeoffs and next steps</a:t>
+              <a:t>Exact tool + arguments; no tools executed in benchmark</a:t>
             </a:r>
           </a:p>
         </p:txBody>
@@ -7186,8 +8702,8 @@
         </p:nvSpPr>
         <p:spPr>
           <a:xfrm xmlns:a="http://schemas.openxmlformats.org/drawingml/2006/main">
-            <a:off x="762000" y="3143250"/>
-            <a:ext cx="10668000" cy="2857500"/>
+            <a:off x="762000" y="5238750"/>
+            <a:ext cx="10668000" cy="904875"/>
           </a:xfrm>
           <a:prstGeom xmlns:a="http://schemas.openxmlformats.org/drawingml/2006/main" prst="rect">
             <a:avLst/>
@@ -7201,13 +8717,14 @@
           <a:bodyPr xmlns:a="http://schemas.openxmlformats.org/drawingml/2006/main"/>
           <a:lstStyle xmlns:a="http://schemas.openxmlformats.org/drawingml/2006/main">
             <a:defPPr>
-              <a:defRPr sz="2025">
+              <a:defRPr sz="1650">
                 <a:solidFill>
                   <a:srgbClr val="D3E0F0"/>
                 </a:solidFill>
               </a:defRPr>
             </a:defPPr>
             <a:lvl1pPr>
+              <a:buNone/>
               <a:defRPr sz="2025">
                 <a:solidFill>
                   <a:srgbClr val="D3E0F0"/>
@@ -7215,6 +8732,7 @@
               </a:defRPr>
             </a:lvl1pPr>
             <a:lvl2pPr>
+              <a:buNone/>
               <a:defRPr sz="2025">
                 <a:solidFill>
                   <a:srgbClr val="D3E0F0"/>
@@ -7222,6 +8740,7 @@
               </a:defRPr>
             </a:lvl2pPr>
             <a:lvl3pPr>
+              <a:buNone/>
               <a:defRPr sz="2025">
                 <a:solidFill>
                   <a:srgbClr val="D3E0F0"/>
@@ -7229,6 +8748,7 @@
               </a:defRPr>
             </a:lvl3pPr>
             <a:lvl4pPr>
+              <a:buNone/>
               <a:defRPr sz="2025">
                 <a:solidFill>
                   <a:srgbClr val="D3E0F0"/>
@@ -7236,6 +8756,7 @@
               </a:defRPr>
             </a:lvl4pPr>
             <a:lvl5pPr>
+              <a:buNone/>
               <a:defRPr sz="2025">
                 <a:solidFill>
                   <a:srgbClr val="D3E0F0"/>
@@ -7243,6 +8764,7 @@
               </a:defRPr>
             </a:lvl5pPr>
             <a:lvl6pPr>
+              <a:buNone/>
               <a:defRPr sz="2025">
                 <a:solidFill>
                   <a:srgbClr val="D3E0F0"/>
@@ -7250,6 +8772,7 @@
               </a:defRPr>
             </a:lvl6pPr>
             <a:lvl7pPr>
+              <a:buNone/>
               <a:defRPr sz="2025">
                 <a:solidFill>
                   <a:srgbClr val="D3E0F0"/>
@@ -7257,6 +8780,7 @@
               </a:defRPr>
             </a:lvl7pPr>
             <a:lvl8pPr>
+              <a:buNone/>
               <a:defRPr sz="2025">
                 <a:solidFill>
                   <a:srgbClr val="D3E0F0"/>
@@ -7264,6 +8788,7 @@
               </a:defRPr>
             </a:lvl8pPr>
             <a:lvl9pPr>
+              <a:buNone/>
               <a:defRPr sz="2025">
                 <a:solidFill>
                   <a:srgbClr val="D3E0F0"/>
@@ -7273,70 +8798,532 @@
           </a:lstStyle>
           <a:p xmlns:a="http://schemas.openxmlformats.org/drawingml/2006/main">
             <a:pPr>
-              <a:defRPr sz="2025">
+              <a:buNone/>
+              <a:defRPr sz="1650">
                 <a:solidFill>
                   <a:srgbClr val="D3E0F0"/>
                 </a:solidFill>
               </a:defRPr>
             </a:pPr>
             <a:r>
-              <a:rPr sz="2025">
+              <a:rPr sz="1650">
                 <a:solidFill>
                   <a:srgbClr val="D3E0F0"/>
                 </a:solidFill>
               </a:rPr>
-              <a:t>Flash Lite extracts intent; B needs no model call.</a:t>
+              <a:t>Keep Haiku for correctness; Gemini is the cheaper fallback.</a:t>
             </a:r>
           </a:p>
           <a:p xmlns:a="http://schemas.openxmlformats.org/drawingml/2006/main">
             <a:pPr>
-              <a:defRPr sz="2025">
+              <a:buNone/>
+              <a:defRPr sz="1650">
                 <a:solidFill>
                   <a:srgbClr val="D3E0F0"/>
                 </a:solidFill>
               </a:defRPr>
             </a:pPr>
             <a:r>
-              <a:rPr sz="2025">
+              <a:rPr sz="1650">
                 <a:solidFill>
                   <a:srgbClr val="D3E0F0"/>
                 </a:solidFill>
               </a:rPr>
-              <a:t>SQLite persists bookings; session checkpoints are in memory.</a:t>
+              <a:t>BYOK upstream cost included. Small sample; no fluency or full-loop test.</a:t>
             </a:r>
           </a:p>
+        </p:txBody>
+      </p:sp>
+      <p:graphicFrame>
+        <p:nvGraphicFramePr>
+          <p:cNvPr id="5" name="">
+            <a:extLst xmlns:a="http://schemas.openxmlformats.org/drawingml/2006/main">
+              <a:ext uri="{FF2B5EF4-FFF2-40B4-BE49-F238E27FC236}">
+                <a16:creationId xmlns:a16="http://schemas.microsoft.com/office/drawing/2014/main" id="{9B7E97F0-44E2-465E-A2C9-819B2769691D}"/>
+              </a:ext>
+            </a:extLst>
+          </p:cNvPr>
+          <p:cNvGraphicFramePr/>
+          <p:nvPr/>
+        </p:nvGraphicFramePr>
+        <p:xfrm>
+          <a:off xmlns:a="http://schemas.openxmlformats.org/drawingml/2006/main" x="762000" y="3048000"/>
+          <a:ext xmlns:a="http://schemas.openxmlformats.org/drawingml/2006/main" cx="10668000" cy="1905000"/>
+        </p:xfrm>
+        <a:graphic xmlns:a="http://schemas.openxmlformats.org/drawingml/2006/main">
+          <a:graphicData uri="http://schemas.openxmlformats.org/drawingml/2006/table">
+            <a:tbl>
+              <a:tblPr/>
+              <a:tblGrid>
+                <a:gridCol w="3619500"/>
+                <a:gridCol w="1619250"/>
+                <a:gridCol w="2190750"/>
+                <a:gridCol w="3238500"/>
+              </a:tblGrid>
+              <a:tr h="476250">
+                <a:tc>
+                  <a:txBody>
+                    <a:bodyPr/>
+                    <a:lstStyle/>
+                    <a:p>
+                      <a:r>
+                        <a:rPr sz="1725" b="1">
+                          <a:solidFill>
+                            <a:srgbClr val="75E2CE"/>
+                          </a:solidFill>
+                        </a:rPr>
+                        <a:t>Model</a:t>
+                      </a:r>
+                    </a:p>
+                  </a:txBody>
+                  <a:tcPr marL="91440" marR="91440" marT="45720" marB="45720">
+                    <a:solidFill>
+                      <a:srgbClr val="1D3048"/>
+                    </a:solidFill>
+                  </a:tcPr>
+                </a:tc>
+                <a:tc>
+                  <a:txBody>
+                    <a:bodyPr/>
+                    <a:lstStyle/>
+                    <a:p>
+                      <a:r>
+                        <a:rPr sz="1725" b="1">
+                          <a:solidFill>
+                            <a:srgbClr val="75E2CE"/>
+                          </a:solidFill>
+                        </a:rPr>
+                        <a:t>Correct</a:t>
+                      </a:r>
+                    </a:p>
+                  </a:txBody>
+                  <a:tcPr marL="91440" marR="91440" marT="45720" marB="45720">
+                    <a:solidFill>
+                      <a:srgbClr val="1D3048"/>
+                    </a:solidFill>
+                  </a:tcPr>
+                </a:tc>
+                <a:tc>
+                  <a:txBody>
+                    <a:bodyPr/>
+                    <a:lstStyle/>
+                    <a:p>
+                      <a:r>
+                        <a:rPr sz="1725" b="1">
+                          <a:solidFill>
+                            <a:srgbClr val="75E2CE"/>
+                          </a:solidFill>
+                        </a:rPr>
+                        <a:t>Median</a:t>
+                      </a:r>
+                    </a:p>
+                  </a:txBody>
+                  <a:tcPr marL="91440" marR="91440" marT="45720" marB="45720">
+                    <a:solidFill>
+                      <a:srgbClr val="1D3048"/>
+                    </a:solidFill>
+                  </a:tcPr>
+                </a:tc>
+                <a:tc>
+                  <a:txBody>
+                    <a:bodyPr/>
+                    <a:lstStyle/>
+                    <a:p>
+                      <a:r>
+                        <a:rPr sz="1725" b="1">
+                          <a:solidFill>
+                            <a:srgbClr val="75E2CE"/>
+                          </a:solidFill>
+                        </a:rPr>
+                        <a:t>Cost / 8 calls</a:t>
+                      </a:r>
+                    </a:p>
+                  </a:txBody>
+                  <a:tcPr marL="91440" marR="91440" marT="45720" marB="45720">
+                    <a:solidFill>
+                      <a:srgbClr val="1D3048"/>
+                    </a:solidFill>
+                  </a:tcPr>
+                </a:tc>
+              </a:tr>
+              <a:tr h="476250">
+                <a:tc>
+                  <a:txBody>
+                    <a:bodyPr/>
+                    <a:lstStyle/>
+                    <a:p>
+                      <a:r>
+                        <a:rPr sz="1725" b="0">
+                          <a:solidFill>
+                            <a:srgbClr val="D3E0F0"/>
+                          </a:solidFill>
+                        </a:rPr>
+                        <a:t>Haiku 4.5</a:t>
+                      </a:r>
+                    </a:p>
+                  </a:txBody>
+                  <a:tcPr marL="91440" marR="91440" marT="45720" marB="45720">
+                    <a:solidFill>
+                      <a:srgbClr val="101B2D"/>
+                    </a:solidFill>
+                  </a:tcPr>
+                </a:tc>
+                <a:tc>
+                  <a:txBody>
+                    <a:bodyPr/>
+                    <a:lstStyle/>
+                    <a:p>
+                      <a:r>
+                        <a:rPr sz="1725" b="0">
+                          <a:solidFill>
+                            <a:srgbClr val="D3E0F0"/>
+                          </a:solidFill>
+                        </a:rPr>
+                        <a:t>8/8</a:t>
+                      </a:r>
+                    </a:p>
+                  </a:txBody>
+                  <a:tcPr marL="91440" marR="91440" marT="45720" marB="45720">
+                    <a:solidFill>
+                      <a:srgbClr val="101B2D"/>
+                    </a:solidFill>
+                  </a:tcPr>
+                </a:tc>
+                <a:tc>
+                  <a:txBody>
+                    <a:bodyPr/>
+                    <a:lstStyle/>
+                    <a:p>
+                      <a:r>
+                        <a:rPr sz="1725" b="0">
+                          <a:solidFill>
+                            <a:srgbClr val="D3E0F0"/>
+                          </a:solidFill>
+                        </a:rPr>
+                        <a:t>2.240 s</a:t>
+                      </a:r>
+                    </a:p>
+                  </a:txBody>
+                  <a:tcPr marL="91440" marR="91440" marT="45720" marB="45720">
+                    <a:solidFill>
+                      <a:srgbClr val="101B2D"/>
+                    </a:solidFill>
+                  </a:tcPr>
+                </a:tc>
+                <a:tc>
+                  <a:txBody>
+                    <a:bodyPr/>
+                    <a:lstStyle/>
+                    <a:p>
+                      <a:r>
+                        <a:rPr sz="1725" b="0">
+                          <a:solidFill>
+                            <a:srgbClr val="D3E0F0"/>
+                          </a:solidFill>
+                        </a:rPr>
+                        <a:t>$0.00970500</a:t>
+                      </a:r>
+                    </a:p>
+                  </a:txBody>
+                  <a:tcPr marL="91440" marR="91440" marT="45720" marB="45720">
+                    <a:solidFill>
+                      <a:srgbClr val="101B2D"/>
+                    </a:solidFill>
+                  </a:tcPr>
+                </a:tc>
+              </a:tr>
+              <a:tr h="476250">
+                <a:tc>
+                  <a:txBody>
+                    <a:bodyPr/>
+                    <a:lstStyle/>
+                    <a:p>
+                      <a:r>
+                        <a:rPr sz="1725" b="0">
+                          <a:solidFill>
+                            <a:srgbClr val="D3E0F0"/>
+                          </a:solidFill>
+                        </a:rPr>
+                        <a:t>Gemini Flash Lite</a:t>
+                      </a:r>
+                    </a:p>
+                  </a:txBody>
+                  <a:tcPr marL="91440" marR="91440" marT="45720" marB="45720">
+                    <a:solidFill>
+                      <a:srgbClr val="101B2D"/>
+                    </a:solidFill>
+                  </a:tcPr>
+                </a:tc>
+                <a:tc>
+                  <a:txBody>
+                    <a:bodyPr/>
+                    <a:lstStyle/>
+                    <a:p>
+                      <a:r>
+                        <a:rPr sz="1725" b="0">
+                          <a:solidFill>
+                            <a:srgbClr val="D3E0F0"/>
+                          </a:solidFill>
+                        </a:rPr>
+                        <a:t>7/8</a:t>
+                      </a:r>
+                    </a:p>
+                  </a:txBody>
+                  <a:tcPr marL="91440" marR="91440" marT="45720" marB="45720">
+                    <a:solidFill>
+                      <a:srgbClr val="101B2D"/>
+                    </a:solidFill>
+                  </a:tcPr>
+                </a:tc>
+                <a:tc>
+                  <a:txBody>
+                    <a:bodyPr/>
+                    <a:lstStyle/>
+                    <a:p>
+                      <a:r>
+                        <a:rPr sz="1725" b="0">
+                          <a:solidFill>
+                            <a:srgbClr val="D3E0F0"/>
+                          </a:solidFill>
+                        </a:rPr>
+                        <a:t>1.493 s</a:t>
+                      </a:r>
+                    </a:p>
+                  </a:txBody>
+                  <a:tcPr marL="91440" marR="91440" marT="45720" marB="45720">
+                    <a:solidFill>
+                      <a:srgbClr val="101B2D"/>
+                    </a:solidFill>
+                  </a:tcPr>
+                </a:tc>
+                <a:tc>
+                  <a:txBody>
+                    <a:bodyPr/>
+                    <a:lstStyle/>
+                    <a:p>
+                      <a:r>
+                        <a:rPr sz="1725" b="0">
+                          <a:solidFill>
+                            <a:srgbClr val="D3E0F0"/>
+                          </a:solidFill>
+                        </a:rPr>
+                        <a:t>$0.00033360</a:t>
+                      </a:r>
+                    </a:p>
+                  </a:txBody>
+                  <a:tcPr marL="91440" marR="91440" marT="45720" marB="45720">
+                    <a:solidFill>
+                      <a:srgbClr val="101B2D"/>
+                    </a:solidFill>
+                  </a:tcPr>
+                </a:tc>
+              </a:tr>
+              <a:tr h="476250">
+                <a:tc>
+                  <a:txBody>
+                    <a:bodyPr/>
+                    <a:lstStyle/>
+                    <a:p>
+                      <a:r>
+                        <a:rPr sz="1725" b="0">
+                          <a:solidFill>
+                            <a:srgbClr val="D3E0F0"/>
+                          </a:solidFill>
+                        </a:rPr>
+                        <a:t>Qwen 30B A3B</a:t>
+                      </a:r>
+                    </a:p>
+                  </a:txBody>
+                  <a:tcPr marL="91440" marR="91440" marT="45720" marB="45720">
+                    <a:solidFill>
+                      <a:srgbClr val="101B2D"/>
+                    </a:solidFill>
+                  </a:tcPr>
+                </a:tc>
+                <a:tc>
+                  <a:txBody>
+                    <a:bodyPr/>
+                    <a:lstStyle/>
+                    <a:p>
+                      <a:r>
+                        <a:rPr sz="1725" b="0">
+                          <a:solidFill>
+                            <a:srgbClr val="D3E0F0"/>
+                          </a:solidFill>
+                        </a:rPr>
+                        <a:t>6/8</a:t>
+                      </a:r>
+                    </a:p>
+                  </a:txBody>
+                  <a:tcPr marL="91440" marR="91440" marT="45720" marB="45720">
+                    <a:solidFill>
+                      <a:srgbClr val="101B2D"/>
+                    </a:solidFill>
+                  </a:tcPr>
+                </a:tc>
+                <a:tc>
+                  <a:txBody>
+                    <a:bodyPr/>
+                    <a:lstStyle/>
+                    <a:p>
+                      <a:r>
+                        <a:rPr sz="1725" b="0">
+                          <a:solidFill>
+                            <a:srgbClr val="D3E0F0"/>
+                          </a:solidFill>
+                        </a:rPr>
+                        <a:t>4.349 s</a:t>
+                      </a:r>
+                    </a:p>
+                  </a:txBody>
+                  <a:tcPr marL="91440" marR="91440" marT="45720" marB="45720">
+                    <a:solidFill>
+                      <a:srgbClr val="101B2D"/>
+                    </a:solidFill>
+                  </a:tcPr>
+                </a:tc>
+                <a:tc>
+                  <a:txBody>
+                    <a:bodyPr/>
+                    <a:lstStyle/>
+                    <a:p>
+                      <a:r>
+                        <a:rPr sz="1725" b="0">
+                          <a:solidFill>
+                            <a:srgbClr val="D3E0F0"/>
+                          </a:solidFill>
+                        </a:rPr>
+                        <a:t>$0.00043569</a:t>
+                      </a:r>
+                    </a:p>
+                  </a:txBody>
+                  <a:tcPr marL="91440" marR="91440" marT="45720" marB="45720">
+                    <a:solidFill>
+                      <a:srgbClr val="101B2D"/>
+                    </a:solidFill>
+                  </a:tcPr>
+                </a:tc>
+              </a:tr>
+            </a:tbl>
+          </a:graphicData>
+        </a:graphic>
+      </p:graphicFrame>
+      <p:sp>
+        <p:nvSpPr>
+          <p:cNvPr id="6" name="">
+            <a:extLst xmlns:a="http://schemas.openxmlformats.org/drawingml/2006/main">
+              <a:ext uri="{FF2B5EF4-FFF2-40B4-BE49-F238E27FC236}">
+                <a16:creationId xmlns:a16="http://schemas.microsoft.com/office/drawing/2014/main" id="{951B8194-6F85-4D84-AA3C-3C43F8CA81F9}"/>
+              </a:ext>
+            </a:extLst>
+          </p:cNvPr>
+          <p:cNvSpPr>
+            <a:spLocks xmlns:a="http://schemas.openxmlformats.org/drawingml/2006/main" noGrp="1"/>
+          </p:cNvSpPr>
+          <p:nvPr/>
+        </p:nvSpPr>
+        <p:spPr>
+          <a:xfrm xmlns:a="http://schemas.openxmlformats.org/drawingml/2006/main">
+            <a:off x="762000" y="6362700"/>
+            <a:ext cx="10668000" cy="285750"/>
+          </a:xfrm>
+          <a:prstGeom xmlns:a="http://schemas.openxmlformats.org/drawingml/2006/main" prst="rect">
+            <a:avLst/>
+          </a:prstGeom>
+          <a:noFill xmlns:a="http://schemas.openxmlformats.org/drawingml/2006/main"/>
+          <a:ln xmlns:a="http://schemas.openxmlformats.org/drawingml/2006/main" w="0">
+            <a:noFill/>
+          </a:ln>
+        </p:spPr>
+        <p:txBody>
+          <a:bodyPr xmlns:a="http://schemas.openxmlformats.org/drawingml/2006/main"/>
+          <a:lstStyle xmlns:a="http://schemas.openxmlformats.org/drawingml/2006/main">
+            <a:defPPr>
+              <a:defRPr sz="975">
+                <a:solidFill>
+                  <a:srgbClr val="8DA3C0"/>
+                </a:solidFill>
+              </a:defRPr>
+            </a:defPPr>
+            <a:lvl1pPr>
+              <a:defRPr sz="975">
+                <a:solidFill>
+                  <a:srgbClr val="8DA3C0"/>
+                </a:solidFill>
+              </a:defRPr>
+            </a:lvl1pPr>
+            <a:lvl2pPr>
+              <a:defRPr sz="975">
+                <a:solidFill>
+                  <a:srgbClr val="8DA3C0"/>
+                </a:solidFill>
+              </a:defRPr>
+            </a:lvl2pPr>
+            <a:lvl3pPr>
+              <a:defRPr sz="975">
+                <a:solidFill>
+                  <a:srgbClr val="8DA3C0"/>
+                </a:solidFill>
+              </a:defRPr>
+            </a:lvl3pPr>
+            <a:lvl4pPr>
+              <a:defRPr sz="975">
+                <a:solidFill>
+                  <a:srgbClr val="8DA3C0"/>
+                </a:solidFill>
+              </a:defRPr>
+            </a:lvl4pPr>
+            <a:lvl5pPr>
+              <a:defRPr sz="975">
+                <a:solidFill>
+                  <a:srgbClr val="8DA3C0"/>
+                </a:solidFill>
+              </a:defRPr>
+            </a:lvl5pPr>
+            <a:lvl6pPr>
+              <a:defRPr sz="975">
+                <a:solidFill>
+                  <a:srgbClr val="8DA3C0"/>
+                </a:solidFill>
+              </a:defRPr>
+            </a:lvl6pPr>
+            <a:lvl7pPr>
+              <a:defRPr sz="975">
+                <a:solidFill>
+                  <a:srgbClr val="8DA3C0"/>
+                </a:solidFill>
+              </a:defRPr>
+            </a:lvl7pPr>
+            <a:lvl8pPr>
+              <a:defRPr sz="975">
+                <a:solidFill>
+                  <a:srgbClr val="8DA3C0"/>
+                </a:solidFill>
+              </a:defRPr>
+            </a:lvl8pPr>
+            <a:lvl9pPr>
+              <a:defRPr sz="975">
+                <a:solidFill>
+                  <a:srgbClr val="8DA3C0"/>
+                </a:solidFill>
+              </a:defRPr>
+            </a:lvl9pPr>
+          </a:lstStyle>
           <a:p xmlns:a="http://schemas.openxmlformats.org/drawingml/2006/main">
             <a:pPr>
-              <a:defRPr sz="2025">
-                <a:solidFill>
-                  <a:srgbClr val="D3E0F0"/>
+              <a:defRPr sz="975">
+                <a:solidFill>
+                  <a:srgbClr val="8DA3C0"/>
                 </a:solidFill>
               </a:defRPr>
             </a:pPr>
             <a:r>
-              <a:rPr sz="2025">
-                <a:solidFill>
-                  <a:srgbClr val="D3E0F0"/>
+              <a:rPr sz="975">
+                <a:solidFill>
+                  <a:srgbClr val="8DA3C0"/>
                 </a:solidFill>
               </a:rPr>
-              <a:t>Local HTTP, synthetic flights, no payments or revocation.</a:t>
-            </a:r>
-          </a:p>
-          <a:p xmlns:a="http://schemas.openxmlformats.org/drawingml/2006/main">
-            <a:pPr>
-              <a:defRPr sz="2025">
-                <a:solidFill>
-                  <a:srgbClr val="D3E0F0"/>
-                </a:solidFill>
-              </a:defRPr>
-            </a:pPr>
-            <a:r>
-              <a:rPr sz="2025">
-                <a:solidFill>
-                  <a:srgbClr val="D3E0F0"/>
-                </a:solidFill>
-              </a:rPr>
-              <a:t>Next: durable sessions, HTTPS and SDK interoperability tests.</a:t>
+              <a:t>Source: docs/model-comparison.md + raw JSON | one-pass fixtures; no statistical significance</a:t>
             </a:r>
           </a:p>
         </p:txBody>
